--- a/My Azure Extension.pptx
+++ b/My Azure Extension.pptx
@@ -11,7 +11,8 @@
     <p:sldId id="260" r:id="rId5"/>
     <p:sldId id="259" r:id="rId6"/>
     <p:sldId id="262" r:id="rId7"/>
-    <p:sldId id="261" r:id="rId8"/>
+    <p:sldId id="263" r:id="rId8"/>
+    <p:sldId id="261" r:id="rId9"/>
   </p:sldIdLst>
   <p:sldSz cx="12192000" cy="6858000"/>
   <p:notesSz cx="6858000" cy="9144000"/>
@@ -265,7 +266,7 @@
           <a:p>
             <a:fld id="{DD956615-4E69-4601-879E-C9C61DEA03B6}" type="datetimeFigureOut">
               <a:rPr lang="en-US" smtClean="0"/>
-              <a:t>7/9/2026</a:t>
+              <a:t>7/25/2026</a:t>
             </a:fld>
             <a:endParaRPr lang="en-US"/>
           </a:p>
@@ -463,7 +464,7 @@
           <a:p>
             <a:fld id="{DD956615-4E69-4601-879E-C9C61DEA03B6}" type="datetimeFigureOut">
               <a:rPr lang="en-US" smtClean="0"/>
-              <a:t>7/9/2026</a:t>
+              <a:t>7/25/2026</a:t>
             </a:fld>
             <a:endParaRPr lang="en-US"/>
           </a:p>
@@ -671,7 +672,7 @@
           <a:p>
             <a:fld id="{DD956615-4E69-4601-879E-C9C61DEA03B6}" type="datetimeFigureOut">
               <a:rPr lang="en-US" smtClean="0"/>
-              <a:t>7/9/2026</a:t>
+              <a:t>7/25/2026</a:t>
             </a:fld>
             <a:endParaRPr lang="en-US"/>
           </a:p>
@@ -869,7 +870,7 @@
           <a:p>
             <a:fld id="{DD956615-4E69-4601-879E-C9C61DEA03B6}" type="datetimeFigureOut">
               <a:rPr lang="en-US" smtClean="0"/>
-              <a:t>7/9/2026</a:t>
+              <a:t>7/25/2026</a:t>
             </a:fld>
             <a:endParaRPr lang="en-US"/>
           </a:p>
@@ -1144,7 +1145,7 @@
           <a:p>
             <a:fld id="{DD956615-4E69-4601-879E-C9C61DEA03B6}" type="datetimeFigureOut">
               <a:rPr lang="en-US" smtClean="0"/>
-              <a:t>7/9/2026</a:t>
+              <a:t>7/25/2026</a:t>
             </a:fld>
             <a:endParaRPr lang="en-US"/>
           </a:p>
@@ -1409,7 +1410,7 @@
           <a:p>
             <a:fld id="{DD956615-4E69-4601-879E-C9C61DEA03B6}" type="datetimeFigureOut">
               <a:rPr lang="en-US" smtClean="0"/>
-              <a:t>7/9/2026</a:t>
+              <a:t>7/25/2026</a:t>
             </a:fld>
             <a:endParaRPr lang="en-US"/>
           </a:p>
@@ -1821,7 +1822,7 @@
           <a:p>
             <a:fld id="{DD956615-4E69-4601-879E-C9C61DEA03B6}" type="datetimeFigureOut">
               <a:rPr lang="en-US" smtClean="0"/>
-              <a:t>7/9/2026</a:t>
+              <a:t>7/25/2026</a:t>
             </a:fld>
             <a:endParaRPr lang="en-US"/>
           </a:p>
@@ -1962,7 +1963,7 @@
           <a:p>
             <a:fld id="{DD956615-4E69-4601-879E-C9C61DEA03B6}" type="datetimeFigureOut">
               <a:rPr lang="en-US" smtClean="0"/>
-              <a:t>7/9/2026</a:t>
+              <a:t>7/25/2026</a:t>
             </a:fld>
             <a:endParaRPr lang="en-US"/>
           </a:p>
@@ -2075,7 +2076,7 @@
           <a:p>
             <a:fld id="{DD956615-4E69-4601-879E-C9C61DEA03B6}" type="datetimeFigureOut">
               <a:rPr lang="en-US" smtClean="0"/>
-              <a:t>7/9/2026</a:t>
+              <a:t>7/25/2026</a:t>
             </a:fld>
             <a:endParaRPr lang="en-US"/>
           </a:p>
@@ -2386,7 +2387,7 @@
           <a:p>
             <a:fld id="{DD956615-4E69-4601-879E-C9C61DEA03B6}" type="datetimeFigureOut">
               <a:rPr lang="en-US" smtClean="0"/>
-              <a:t>7/9/2026</a:t>
+              <a:t>7/25/2026</a:t>
             </a:fld>
             <a:endParaRPr lang="en-US"/>
           </a:p>
@@ -2674,7 +2675,7 @@
           <a:p>
             <a:fld id="{DD956615-4E69-4601-879E-C9C61DEA03B6}" type="datetimeFigureOut">
               <a:rPr lang="en-US" smtClean="0"/>
-              <a:t>7/9/2026</a:t>
+              <a:t>7/25/2026</a:t>
             </a:fld>
             <a:endParaRPr lang="en-US"/>
           </a:p>
@@ -2915,7 +2916,7 @@
           <a:p>
             <a:fld id="{DD956615-4E69-4601-879E-C9C61DEA03B6}" type="datetimeFigureOut">
               <a:rPr lang="en-US" smtClean="0"/>
-              <a:t>7/9/2026</a:t>
+              <a:t>7/25/2026</a:t>
             </a:fld>
             <a:endParaRPr lang="en-US"/>
           </a:p>
@@ -3472,6 +3473,36 @@
           </a:prstGeom>
         </p:spPr>
       </p:pic>
+      <p:pic>
+        <p:nvPicPr>
+          <p:cNvPr id="4" name="Picture 3">
+            <a:extLst>
+              <a:ext uri="{FF2B5EF4-FFF2-40B4-BE49-F238E27FC236}">
+                <a16:creationId xmlns:a16="http://schemas.microsoft.com/office/drawing/2014/main" id="{E7A50CB4-D7F1-A697-A3D9-881E09E0FC0C}"/>
+              </a:ext>
+            </a:extLst>
+          </p:cNvPr>
+          <p:cNvPicPr>
+            <a:picLocks noChangeAspect="1"/>
+          </p:cNvPicPr>
+          <p:nvPr/>
+        </p:nvPicPr>
+        <p:blipFill>
+          <a:blip r:embed="rId3"/>
+          <a:stretch>
+            <a:fillRect/>
+          </a:stretch>
+        </p:blipFill>
+        <p:spPr>
+          <a:xfrm>
+            <a:off x="7256213" y="-28682"/>
+            <a:ext cx="3572374" cy="5677692"/>
+          </a:xfrm>
+          <a:prstGeom prst="rect">
+            <a:avLst/>
+          </a:prstGeom>
+        </p:spPr>
+      </p:pic>
       <p:sp>
         <p:nvSpPr>
           <p:cNvPr id="6" name="Rectangle 5">
@@ -3486,8 +3517,8 @@
         </p:nvSpPr>
         <p:spPr>
           <a:xfrm>
-            <a:off x="6038850" y="0"/>
-            <a:ext cx="4711700" cy="1022350"/>
+            <a:off x="7389091" y="1208990"/>
+            <a:ext cx="3439496" cy="1691228"/>
           </a:xfrm>
           <a:prstGeom prst="rect">
             <a:avLst/>
@@ -3526,10 +3557,10 @@
       </p:sp>
       <p:sp>
         <p:nvSpPr>
-          <p:cNvPr id="2" name="Speech Bubble: Rectangle 1">
-            <a:extLst>
-              <a:ext uri="{FF2B5EF4-FFF2-40B4-BE49-F238E27FC236}">
-                <a16:creationId xmlns:a16="http://schemas.microsoft.com/office/drawing/2014/main" id="{AB62C5D2-3D80-4299-A136-6E7D5DE53E77}"/>
+          <p:cNvPr id="7" name="Rectangle 6">
+            <a:extLst>
+              <a:ext uri="{FF2B5EF4-FFF2-40B4-BE49-F238E27FC236}">
+                <a16:creationId xmlns:a16="http://schemas.microsoft.com/office/drawing/2014/main" id="{4DC68636-D51D-A331-737C-8DE3CB1B9086}"/>
               </a:ext>
             </a:extLst>
           </p:cNvPr>
@@ -3538,13 +3569,59 @@
         </p:nvSpPr>
         <p:spPr>
           <a:xfrm>
-            <a:off x="228600" y="883920"/>
-            <a:ext cx="5521960" cy="949960"/>
+            <a:off x="7620000" y="1958109"/>
+            <a:ext cx="2706255" cy="166255"/>
+          </a:xfrm>
+          <a:prstGeom prst="rect">
+            <a:avLst/>
+          </a:prstGeom>
+        </p:spPr>
+        <p:style>
+          <a:lnRef idx="2">
+            <a:schemeClr val="accent1">
+              <a:shade val="15000"/>
+            </a:schemeClr>
+          </a:lnRef>
+          <a:fillRef idx="1">
+            <a:schemeClr val="accent1"/>
+          </a:fillRef>
+          <a:effectRef idx="0">
+            <a:schemeClr val="accent1"/>
+          </a:effectRef>
+          <a:fontRef idx="minor">
+            <a:schemeClr val="lt1"/>
+          </a:fontRef>
+        </p:style>
+        <p:txBody>
+          <a:bodyPr rtlCol="0" anchor="ctr"/>
+          <a:lstStyle/>
+          <a:p>
+            <a:pPr algn="ctr"/>
+            <a:endParaRPr lang="en-US"/>
+          </a:p>
+        </p:txBody>
+      </p:sp>
+      <p:sp>
+        <p:nvSpPr>
+          <p:cNvPr id="2" name="Speech Bubble: Rectangle 1">
+            <a:extLst>
+              <a:ext uri="{FF2B5EF4-FFF2-40B4-BE49-F238E27FC236}">
+                <a16:creationId xmlns:a16="http://schemas.microsoft.com/office/drawing/2014/main" id="{AB62C5D2-3D80-4299-A136-6E7D5DE53E77}"/>
+              </a:ext>
+            </a:extLst>
+          </p:cNvPr>
+          <p:cNvSpPr/>
+          <p:nvPr/>
+        </p:nvSpPr>
+        <p:spPr>
+          <a:xfrm>
+            <a:off x="1734253" y="77815"/>
+            <a:ext cx="5521960" cy="4124729"/>
           </a:xfrm>
           <a:prstGeom prst="wedgeRectCallout">
             <a:avLst>
-              <a:gd name="adj1" fmla="val 40809"/>
-              <a:gd name="adj2" fmla="val -94262"/>
+              <a:gd name="adj1" fmla="val 53856"/>
+              <a:gd name="adj2" fmla="val -17903"/>
             </a:avLst>
           </a:prstGeom>
         </p:spPr>
@@ -3569,7 +3646,7 @@
             <a:pPr algn="ctr"/>
             <a:r>
               <a:rPr lang="en-US" sz="3200" dirty="0"/>
-              <a:t>Setup background image</a:t>
+              <a:t>Background image</a:t>
             </a:r>
           </a:p>
         </p:txBody>
@@ -3606,10 +3683,10 @@
       </p:grpSpPr>
       <p:pic>
         <p:nvPicPr>
-          <p:cNvPr id="5" name="Picture 4">
-            <a:extLst>
-              <a:ext uri="{FF2B5EF4-FFF2-40B4-BE49-F238E27FC236}">
-                <a16:creationId xmlns:a16="http://schemas.microsoft.com/office/drawing/2014/main" id="{0828F26B-46E4-421A-9986-3CB73BE70F4D}"/>
+          <p:cNvPr id="12" name="Picture 11">
+            <a:extLst>
+              <a:ext uri="{FF2B5EF4-FFF2-40B4-BE49-F238E27FC236}">
+                <a16:creationId xmlns:a16="http://schemas.microsoft.com/office/drawing/2014/main" id="{D3563561-FBA5-DF51-5ED2-F38549C4ABD0}"/>
               </a:ext>
             </a:extLst>
           </p:cNvPr>
@@ -3626,8 +3703,8 @@
         </p:blipFill>
         <p:spPr>
           <a:xfrm>
-            <a:off x="3362325" y="1855787"/>
-            <a:ext cx="5886450" cy="3057525"/>
+            <a:off x="6000713" y="302376"/>
+            <a:ext cx="5068007" cy="3200847"/>
           </a:xfrm>
           <a:prstGeom prst="rect">
             <a:avLst/>
@@ -3636,10 +3713,10 @@
       </p:pic>
       <p:pic>
         <p:nvPicPr>
-          <p:cNvPr id="7" name="Picture 6">
-            <a:extLst>
-              <a:ext uri="{FF2B5EF4-FFF2-40B4-BE49-F238E27FC236}">
-                <a16:creationId xmlns:a16="http://schemas.microsoft.com/office/drawing/2014/main" id="{CE2DBC61-8605-4A8C-91E5-BD87CC8A143F}"/>
+          <p:cNvPr id="8" name="Picture 7">
+            <a:extLst>
+              <a:ext uri="{FF2B5EF4-FFF2-40B4-BE49-F238E27FC236}">
+                <a16:creationId xmlns:a16="http://schemas.microsoft.com/office/drawing/2014/main" id="{05E6313B-176A-77F0-6FE3-0477799747E2}"/>
               </a:ext>
             </a:extLst>
           </p:cNvPr>
@@ -3656,44 +3733,14 @@
         </p:blipFill>
         <p:spPr>
           <a:xfrm>
-            <a:off x="2600325" y="771525"/>
-            <a:ext cx="6991350" cy="5314950"/>
+            <a:off x="2393122" y="302376"/>
+            <a:ext cx="3581900" cy="5772956"/>
           </a:xfrm>
           <a:prstGeom prst="rect">
             <a:avLst/>
           </a:prstGeom>
         </p:spPr>
       </p:pic>
-      <p:pic>
-        <p:nvPicPr>
-          <p:cNvPr id="9" name="Picture 8">
-            <a:extLst>
-              <a:ext uri="{FF2B5EF4-FFF2-40B4-BE49-F238E27FC236}">
-                <a16:creationId xmlns:a16="http://schemas.microsoft.com/office/drawing/2014/main" id="{A17833E4-1897-4767-AEAF-3C843FB36477}"/>
-              </a:ext>
-            </a:extLst>
-          </p:cNvPr>
-          <p:cNvPicPr>
-            <a:picLocks noChangeAspect="1"/>
-          </p:cNvPicPr>
-          <p:nvPr/>
-        </p:nvPicPr>
-        <p:blipFill>
-          <a:blip r:embed="rId4"/>
-          <a:stretch>
-            <a:fillRect/>
-          </a:stretch>
-        </p:blipFill>
-        <p:spPr>
-          <a:xfrm>
-            <a:off x="2600325" y="840996"/>
-            <a:ext cx="4924425" cy="4572000"/>
-          </a:xfrm>
-          <a:prstGeom prst="rect">
-            <a:avLst/>
-          </a:prstGeom>
-        </p:spPr>
-      </p:pic>
       <p:sp>
         <p:nvSpPr>
           <p:cNvPr id="11" name="Rectangle 10">
@@ -3708,8 +3755,8 @@
         </p:nvSpPr>
         <p:spPr>
           <a:xfrm>
-            <a:off x="2600325" y="3464560"/>
-            <a:ext cx="2169795" cy="1320800"/>
+            <a:off x="2461779" y="3279833"/>
+            <a:ext cx="3366366" cy="1781694"/>
           </a:xfrm>
           <a:prstGeom prst="rect">
             <a:avLst/>
@@ -3760,7 +3807,7 @@
         </p:nvSpPr>
         <p:spPr>
           <a:xfrm>
-            <a:off x="7477760" y="784604"/>
+            <a:off x="8954805" y="302376"/>
             <a:ext cx="2113915" cy="397704"/>
           </a:xfrm>
           <a:prstGeom prst="rect">
@@ -3812,7 +3859,7 @@
         </p:nvSpPr>
         <p:spPr>
           <a:xfrm>
-            <a:off x="3139440" y="1637158"/>
+            <a:off x="5143731" y="1221522"/>
             <a:ext cx="5521960" cy="949960"/>
           </a:xfrm>
           <a:prstGeom prst="wedgeRectCallout">
@@ -3850,7 +3897,7 @@
             <a:pPr algn="ctr"/>
             <a:r>
               <a:rPr lang="en-US" sz="3200" dirty="0"/>
-              <a:t>Azure AD tenant name</a:t>
+              <a:t>Entra ID tenant name</a:t>
             </a:r>
           </a:p>
         </p:txBody>
@@ -4352,10 +4399,10 @@
       </p:grpSpPr>
       <p:pic>
         <p:nvPicPr>
-          <p:cNvPr id="5" name="Picture 4">
-            <a:extLst>
-              <a:ext uri="{FF2B5EF4-FFF2-40B4-BE49-F238E27FC236}">
-                <a16:creationId xmlns:a16="http://schemas.microsoft.com/office/drawing/2014/main" id="{EFD62122-1E9B-A461-F9F4-1A9E7DFC6C06}"/>
+          <p:cNvPr id="3" name="Picture 2">
+            <a:extLst>
+              <a:ext uri="{FF2B5EF4-FFF2-40B4-BE49-F238E27FC236}">
+                <a16:creationId xmlns:a16="http://schemas.microsoft.com/office/drawing/2014/main" id="{4386F712-283E-CDC2-FF63-BE9347234A31}"/>
               </a:ext>
             </a:extLst>
           </p:cNvPr>
@@ -4372,8 +4419,8 @@
         </p:blipFill>
         <p:spPr>
           <a:xfrm>
-            <a:off x="3600101" y="585390"/>
-            <a:ext cx="4991797" cy="5687219"/>
+            <a:off x="4295523" y="580627"/>
+            <a:ext cx="3600953" cy="5696745"/>
           </a:xfrm>
           <a:prstGeom prst="rect">
             <a:avLst/>
@@ -4394,8 +4441,8 @@
         </p:nvSpPr>
         <p:spPr>
           <a:xfrm>
-            <a:off x="3600100" y="3965027"/>
-            <a:ext cx="4834451" cy="1931275"/>
+            <a:off x="4295523" y="3307771"/>
+            <a:ext cx="3379895" cy="2899065"/>
           </a:xfrm>
           <a:prstGeom prst="rect">
             <a:avLst/>
@@ -4446,7 +4493,7 @@
         </p:nvSpPr>
         <p:spPr>
           <a:xfrm>
-            <a:off x="4382814" y="4903076"/>
+            <a:off x="4687614" y="4653694"/>
             <a:ext cx="2151993" cy="134007"/>
           </a:xfrm>
           <a:prstGeom prst="rect">
@@ -4492,7 +4539,7 @@
         </p:nvSpPr>
         <p:spPr>
           <a:xfrm>
-            <a:off x="4382814" y="5256485"/>
+            <a:off x="4687613" y="5239046"/>
             <a:ext cx="2151993" cy="134007"/>
           </a:xfrm>
           <a:prstGeom prst="rect">
@@ -4538,7 +4585,7 @@
         </p:nvSpPr>
         <p:spPr>
           <a:xfrm>
-            <a:off x="4382813" y="4568057"/>
+            <a:off x="4687613" y="4063441"/>
             <a:ext cx="2151993" cy="134007"/>
           </a:xfrm>
           <a:prstGeom prst="rect">
@@ -4566,7 +4613,7 @@
           <a:lstStyle/>
           <a:p>
             <a:pPr algn="ctr"/>
-            <a:endParaRPr lang="en-US"/>
+            <a:endParaRPr lang="en-US" dirty="0"/>
           </a:p>
         </p:txBody>
       </p:sp>
@@ -4584,6 +4631,572 @@
 </file>
 
 <file path=ppt/slides/slide7.xml><?xml version="1.0" encoding="utf-8"?>
+<p:sld xmlns:a="http://schemas.openxmlformats.org/drawingml/2006/main" xmlns:r="http://schemas.openxmlformats.org/officeDocument/2006/relationships" xmlns:p="http://schemas.openxmlformats.org/presentationml/2006/main">
+  <p:cSld>
+    <p:spTree>
+      <p:nvGrpSpPr>
+        <p:cNvPr id="1" name=""/>
+        <p:cNvGrpSpPr/>
+        <p:nvPr/>
+      </p:nvGrpSpPr>
+      <p:grpSpPr>
+        <a:xfrm>
+          <a:off x="0" y="0"/>
+          <a:ext cx="0" cy="0"/>
+          <a:chOff x="0" y="0"/>
+          <a:chExt cx="0" cy="0"/>
+        </a:xfrm>
+      </p:grpSpPr>
+      <p:pic>
+        <p:nvPicPr>
+          <p:cNvPr id="5" name="Picture 4">
+            <a:extLst>
+              <a:ext uri="{FF2B5EF4-FFF2-40B4-BE49-F238E27FC236}">
+                <a16:creationId xmlns:a16="http://schemas.microsoft.com/office/drawing/2014/main" id="{68D03932-C0AC-D298-7E89-CE8BD615E5A3}"/>
+              </a:ext>
+            </a:extLst>
+          </p:cNvPr>
+          <p:cNvPicPr>
+            <a:picLocks noChangeAspect="1"/>
+          </p:cNvPicPr>
+          <p:nvPr/>
+        </p:nvPicPr>
+        <p:blipFill>
+          <a:blip r:embed="rId2"/>
+          <a:stretch>
+            <a:fillRect/>
+          </a:stretch>
+        </p:blipFill>
+        <p:spPr>
+          <a:xfrm>
+            <a:off x="2614126" y="409153"/>
+            <a:ext cx="6963747" cy="6039693"/>
+          </a:xfrm>
+          <a:prstGeom prst="rect">
+            <a:avLst/>
+          </a:prstGeom>
+        </p:spPr>
+      </p:pic>
+      <p:sp>
+        <p:nvSpPr>
+          <p:cNvPr id="7" name="Rectangle 6">
+            <a:extLst>
+              <a:ext uri="{FF2B5EF4-FFF2-40B4-BE49-F238E27FC236}">
+                <a16:creationId xmlns:a16="http://schemas.microsoft.com/office/drawing/2014/main" id="{7D3CCFFC-C383-AA78-D695-4263D2DDAC2C}"/>
+              </a:ext>
+            </a:extLst>
+          </p:cNvPr>
+          <p:cNvSpPr/>
+          <p:nvPr/>
+        </p:nvSpPr>
+        <p:spPr>
+          <a:xfrm>
+            <a:off x="6095999" y="1608999"/>
+            <a:ext cx="2151993" cy="134007"/>
+          </a:xfrm>
+          <a:prstGeom prst="rect">
+            <a:avLst/>
+          </a:prstGeom>
+        </p:spPr>
+        <p:style>
+          <a:lnRef idx="2">
+            <a:schemeClr val="accent2">
+              <a:shade val="15000"/>
+            </a:schemeClr>
+          </a:lnRef>
+          <a:fillRef idx="1">
+            <a:schemeClr val="accent2"/>
+          </a:fillRef>
+          <a:effectRef idx="0">
+            <a:schemeClr val="accent2"/>
+          </a:effectRef>
+          <a:fontRef idx="minor">
+            <a:schemeClr val="lt1"/>
+          </a:fontRef>
+        </p:style>
+        <p:txBody>
+          <a:bodyPr rtlCol="0" anchor="ctr"/>
+          <a:lstStyle/>
+          <a:p>
+            <a:pPr algn="ctr"/>
+            <a:endParaRPr lang="en-US" dirty="0"/>
+          </a:p>
+        </p:txBody>
+      </p:sp>
+      <p:sp>
+        <p:nvSpPr>
+          <p:cNvPr id="9" name="Rectangle 8">
+            <a:extLst>
+              <a:ext uri="{FF2B5EF4-FFF2-40B4-BE49-F238E27FC236}">
+                <a16:creationId xmlns:a16="http://schemas.microsoft.com/office/drawing/2014/main" id="{5195E67E-570B-6D26-B181-22FBEF3ED126}"/>
+              </a:ext>
+            </a:extLst>
+          </p:cNvPr>
+          <p:cNvSpPr/>
+          <p:nvPr/>
+        </p:nvSpPr>
+        <p:spPr>
+          <a:xfrm>
+            <a:off x="6801853" y="2322873"/>
+            <a:ext cx="1668380" cy="134007"/>
+          </a:xfrm>
+          <a:prstGeom prst="rect">
+            <a:avLst/>
+          </a:prstGeom>
+        </p:spPr>
+        <p:style>
+          <a:lnRef idx="2">
+            <a:schemeClr val="accent2">
+              <a:shade val="15000"/>
+            </a:schemeClr>
+          </a:lnRef>
+          <a:fillRef idx="1">
+            <a:schemeClr val="accent2"/>
+          </a:fillRef>
+          <a:effectRef idx="0">
+            <a:schemeClr val="accent2"/>
+          </a:effectRef>
+          <a:fontRef idx="minor">
+            <a:schemeClr val="lt1"/>
+          </a:fontRef>
+        </p:style>
+        <p:txBody>
+          <a:bodyPr rtlCol="0" anchor="ctr"/>
+          <a:lstStyle/>
+          <a:p>
+            <a:pPr algn="ctr"/>
+            <a:endParaRPr lang="en-US" dirty="0"/>
+          </a:p>
+        </p:txBody>
+      </p:sp>
+      <p:sp>
+        <p:nvSpPr>
+          <p:cNvPr id="11" name="Rectangle 10">
+            <a:extLst>
+              <a:ext uri="{FF2B5EF4-FFF2-40B4-BE49-F238E27FC236}">
+                <a16:creationId xmlns:a16="http://schemas.microsoft.com/office/drawing/2014/main" id="{22C4E748-44DD-1B6F-65C2-2A1224CD4370}"/>
+              </a:ext>
+            </a:extLst>
+          </p:cNvPr>
+          <p:cNvSpPr/>
+          <p:nvPr/>
+        </p:nvSpPr>
+        <p:spPr>
+          <a:xfrm>
+            <a:off x="6916498" y="2715904"/>
+            <a:ext cx="1668380" cy="134007"/>
+          </a:xfrm>
+          <a:prstGeom prst="rect">
+            <a:avLst/>
+          </a:prstGeom>
+        </p:spPr>
+        <p:style>
+          <a:lnRef idx="2">
+            <a:schemeClr val="accent2">
+              <a:shade val="15000"/>
+            </a:schemeClr>
+          </a:lnRef>
+          <a:fillRef idx="1">
+            <a:schemeClr val="accent2"/>
+          </a:fillRef>
+          <a:effectRef idx="0">
+            <a:schemeClr val="accent2"/>
+          </a:effectRef>
+          <a:fontRef idx="minor">
+            <a:schemeClr val="lt1"/>
+          </a:fontRef>
+        </p:style>
+        <p:txBody>
+          <a:bodyPr rtlCol="0" anchor="ctr"/>
+          <a:lstStyle/>
+          <a:p>
+            <a:pPr algn="ctr"/>
+            <a:endParaRPr lang="en-US" dirty="0"/>
+          </a:p>
+        </p:txBody>
+      </p:sp>
+      <p:sp>
+        <p:nvSpPr>
+          <p:cNvPr id="13" name="Rectangle 12">
+            <a:extLst>
+              <a:ext uri="{FF2B5EF4-FFF2-40B4-BE49-F238E27FC236}">
+                <a16:creationId xmlns:a16="http://schemas.microsoft.com/office/drawing/2014/main" id="{267413CA-CCA6-2DC0-6AF2-4F0A30FF814F}"/>
+              </a:ext>
+            </a:extLst>
+          </p:cNvPr>
+          <p:cNvSpPr/>
+          <p:nvPr/>
+        </p:nvSpPr>
+        <p:spPr>
+          <a:xfrm>
+            <a:off x="6801853" y="3103351"/>
+            <a:ext cx="1668380" cy="134007"/>
+          </a:xfrm>
+          <a:prstGeom prst="rect">
+            <a:avLst/>
+          </a:prstGeom>
+        </p:spPr>
+        <p:style>
+          <a:lnRef idx="2">
+            <a:schemeClr val="accent2">
+              <a:shade val="15000"/>
+            </a:schemeClr>
+          </a:lnRef>
+          <a:fillRef idx="1">
+            <a:schemeClr val="accent2"/>
+          </a:fillRef>
+          <a:effectRef idx="0">
+            <a:schemeClr val="accent2"/>
+          </a:effectRef>
+          <a:fontRef idx="minor">
+            <a:schemeClr val="lt1"/>
+          </a:fontRef>
+        </p:style>
+        <p:txBody>
+          <a:bodyPr rtlCol="0" anchor="ctr"/>
+          <a:lstStyle/>
+          <a:p>
+            <a:pPr algn="ctr"/>
+            <a:endParaRPr lang="en-US" dirty="0"/>
+          </a:p>
+        </p:txBody>
+      </p:sp>
+      <p:sp>
+        <p:nvSpPr>
+          <p:cNvPr id="15" name="Rectangle 14">
+            <a:extLst>
+              <a:ext uri="{FF2B5EF4-FFF2-40B4-BE49-F238E27FC236}">
+                <a16:creationId xmlns:a16="http://schemas.microsoft.com/office/drawing/2014/main" id="{FB536D0D-F6F1-A154-3AAE-3817243B76AA}"/>
+              </a:ext>
+            </a:extLst>
+          </p:cNvPr>
+          <p:cNvSpPr/>
+          <p:nvPr/>
+        </p:nvSpPr>
+        <p:spPr>
+          <a:xfrm>
+            <a:off x="6681537" y="3475470"/>
+            <a:ext cx="1668380" cy="134007"/>
+          </a:xfrm>
+          <a:prstGeom prst="rect">
+            <a:avLst/>
+          </a:prstGeom>
+        </p:spPr>
+        <p:style>
+          <a:lnRef idx="2">
+            <a:schemeClr val="accent2">
+              <a:shade val="15000"/>
+            </a:schemeClr>
+          </a:lnRef>
+          <a:fillRef idx="1">
+            <a:schemeClr val="accent2"/>
+          </a:fillRef>
+          <a:effectRef idx="0">
+            <a:schemeClr val="accent2"/>
+          </a:effectRef>
+          <a:fontRef idx="minor">
+            <a:schemeClr val="lt1"/>
+          </a:fontRef>
+        </p:style>
+        <p:txBody>
+          <a:bodyPr rtlCol="0" anchor="ctr"/>
+          <a:lstStyle/>
+          <a:p>
+            <a:pPr algn="ctr"/>
+            <a:endParaRPr lang="en-US" dirty="0"/>
+          </a:p>
+        </p:txBody>
+      </p:sp>
+      <p:sp>
+        <p:nvSpPr>
+          <p:cNvPr id="17" name="Rectangle 16">
+            <a:extLst>
+              <a:ext uri="{FF2B5EF4-FFF2-40B4-BE49-F238E27FC236}">
+                <a16:creationId xmlns:a16="http://schemas.microsoft.com/office/drawing/2014/main" id="{97F36EFD-B659-8A6C-2976-806CB84DAEB4}"/>
+              </a:ext>
+            </a:extLst>
+          </p:cNvPr>
+          <p:cNvSpPr/>
+          <p:nvPr/>
+        </p:nvSpPr>
+        <p:spPr>
+          <a:xfrm>
+            <a:off x="6681537" y="3894915"/>
+            <a:ext cx="1668380" cy="134007"/>
+          </a:xfrm>
+          <a:prstGeom prst="rect">
+            <a:avLst/>
+          </a:prstGeom>
+        </p:spPr>
+        <p:style>
+          <a:lnRef idx="2">
+            <a:schemeClr val="accent2">
+              <a:shade val="15000"/>
+            </a:schemeClr>
+          </a:lnRef>
+          <a:fillRef idx="1">
+            <a:schemeClr val="accent2"/>
+          </a:fillRef>
+          <a:effectRef idx="0">
+            <a:schemeClr val="accent2"/>
+          </a:effectRef>
+          <a:fontRef idx="minor">
+            <a:schemeClr val="lt1"/>
+          </a:fontRef>
+        </p:style>
+        <p:txBody>
+          <a:bodyPr rtlCol="0" anchor="ctr"/>
+          <a:lstStyle/>
+          <a:p>
+            <a:pPr algn="ctr"/>
+            <a:endParaRPr lang="en-US" dirty="0"/>
+          </a:p>
+        </p:txBody>
+      </p:sp>
+      <p:sp>
+        <p:nvSpPr>
+          <p:cNvPr id="19" name="Rectangle 18">
+            <a:extLst>
+              <a:ext uri="{FF2B5EF4-FFF2-40B4-BE49-F238E27FC236}">
+                <a16:creationId xmlns:a16="http://schemas.microsoft.com/office/drawing/2014/main" id="{15FCB042-481B-213F-91D6-C1C973CCACB2}"/>
+              </a:ext>
+            </a:extLst>
+          </p:cNvPr>
+          <p:cNvSpPr/>
+          <p:nvPr/>
+        </p:nvSpPr>
+        <p:spPr>
+          <a:xfrm>
+            <a:off x="6681537" y="4448368"/>
+            <a:ext cx="2654968" cy="134007"/>
+          </a:xfrm>
+          <a:prstGeom prst="rect">
+            <a:avLst/>
+          </a:prstGeom>
+        </p:spPr>
+        <p:style>
+          <a:lnRef idx="2">
+            <a:schemeClr val="accent2">
+              <a:shade val="15000"/>
+            </a:schemeClr>
+          </a:lnRef>
+          <a:fillRef idx="1">
+            <a:schemeClr val="accent2"/>
+          </a:fillRef>
+          <a:effectRef idx="0">
+            <a:schemeClr val="accent2"/>
+          </a:effectRef>
+          <a:fontRef idx="minor">
+            <a:schemeClr val="lt1"/>
+          </a:fontRef>
+        </p:style>
+        <p:txBody>
+          <a:bodyPr rtlCol="0" anchor="ctr"/>
+          <a:lstStyle/>
+          <a:p>
+            <a:pPr algn="ctr"/>
+            <a:endParaRPr lang="en-US" dirty="0"/>
+          </a:p>
+        </p:txBody>
+      </p:sp>
+      <p:sp>
+        <p:nvSpPr>
+          <p:cNvPr id="21" name="Rectangle 20">
+            <a:extLst>
+              <a:ext uri="{FF2B5EF4-FFF2-40B4-BE49-F238E27FC236}">
+                <a16:creationId xmlns:a16="http://schemas.microsoft.com/office/drawing/2014/main" id="{6FABFCEF-54E0-7BC5-EC10-3F9AD95AD44D}"/>
+              </a:ext>
+            </a:extLst>
+          </p:cNvPr>
+          <p:cNvSpPr/>
+          <p:nvPr/>
+        </p:nvSpPr>
+        <p:spPr>
+          <a:xfrm>
+            <a:off x="6681537" y="4835815"/>
+            <a:ext cx="2654968" cy="134007"/>
+          </a:xfrm>
+          <a:prstGeom prst="rect">
+            <a:avLst/>
+          </a:prstGeom>
+        </p:spPr>
+        <p:style>
+          <a:lnRef idx="2">
+            <a:schemeClr val="accent2">
+              <a:shade val="15000"/>
+            </a:schemeClr>
+          </a:lnRef>
+          <a:fillRef idx="1">
+            <a:schemeClr val="accent2"/>
+          </a:fillRef>
+          <a:effectRef idx="0">
+            <a:schemeClr val="accent2"/>
+          </a:effectRef>
+          <a:fontRef idx="minor">
+            <a:schemeClr val="lt1"/>
+          </a:fontRef>
+        </p:style>
+        <p:txBody>
+          <a:bodyPr rtlCol="0" anchor="ctr"/>
+          <a:lstStyle/>
+          <a:p>
+            <a:pPr algn="ctr"/>
+            <a:endParaRPr lang="en-US" dirty="0"/>
+          </a:p>
+        </p:txBody>
+      </p:sp>
+      <p:sp>
+        <p:nvSpPr>
+          <p:cNvPr id="23" name="Rectangle 22">
+            <a:extLst>
+              <a:ext uri="{FF2B5EF4-FFF2-40B4-BE49-F238E27FC236}">
+                <a16:creationId xmlns:a16="http://schemas.microsoft.com/office/drawing/2014/main" id="{9936A0C8-36D6-4A6F-9427-D8D5C5F2E849}"/>
+              </a:ext>
+            </a:extLst>
+          </p:cNvPr>
+          <p:cNvSpPr/>
+          <p:nvPr/>
+        </p:nvSpPr>
+        <p:spPr>
+          <a:xfrm>
+            <a:off x="6681537" y="5249001"/>
+            <a:ext cx="2654968" cy="134007"/>
+          </a:xfrm>
+          <a:prstGeom prst="rect">
+            <a:avLst/>
+          </a:prstGeom>
+        </p:spPr>
+        <p:style>
+          <a:lnRef idx="2">
+            <a:schemeClr val="accent2">
+              <a:shade val="15000"/>
+            </a:schemeClr>
+          </a:lnRef>
+          <a:fillRef idx="1">
+            <a:schemeClr val="accent2"/>
+          </a:fillRef>
+          <a:effectRef idx="0">
+            <a:schemeClr val="accent2"/>
+          </a:effectRef>
+          <a:fontRef idx="minor">
+            <a:schemeClr val="lt1"/>
+          </a:fontRef>
+        </p:style>
+        <p:txBody>
+          <a:bodyPr rtlCol="0" anchor="ctr"/>
+          <a:lstStyle/>
+          <a:p>
+            <a:pPr algn="ctr"/>
+            <a:endParaRPr lang="en-US" dirty="0"/>
+          </a:p>
+        </p:txBody>
+      </p:sp>
+      <p:sp>
+        <p:nvSpPr>
+          <p:cNvPr id="25" name="Rectangle 24">
+            <a:extLst>
+              <a:ext uri="{FF2B5EF4-FFF2-40B4-BE49-F238E27FC236}">
+                <a16:creationId xmlns:a16="http://schemas.microsoft.com/office/drawing/2014/main" id="{AA82D259-7054-45FC-68BA-0C797E5D331C}"/>
+              </a:ext>
+            </a:extLst>
+          </p:cNvPr>
+          <p:cNvSpPr/>
+          <p:nvPr/>
+        </p:nvSpPr>
+        <p:spPr>
+          <a:xfrm>
+            <a:off x="7395411" y="5595183"/>
+            <a:ext cx="1443789" cy="134007"/>
+          </a:xfrm>
+          <a:prstGeom prst="rect">
+            <a:avLst/>
+          </a:prstGeom>
+        </p:spPr>
+        <p:style>
+          <a:lnRef idx="2">
+            <a:schemeClr val="accent2">
+              <a:shade val="15000"/>
+            </a:schemeClr>
+          </a:lnRef>
+          <a:fillRef idx="1">
+            <a:schemeClr val="accent2"/>
+          </a:fillRef>
+          <a:effectRef idx="0">
+            <a:schemeClr val="accent2"/>
+          </a:effectRef>
+          <a:fontRef idx="minor">
+            <a:schemeClr val="lt1"/>
+          </a:fontRef>
+        </p:style>
+        <p:txBody>
+          <a:bodyPr rtlCol="0" anchor="ctr"/>
+          <a:lstStyle/>
+          <a:p>
+            <a:pPr algn="ctr"/>
+            <a:endParaRPr lang="en-US" dirty="0"/>
+          </a:p>
+        </p:txBody>
+      </p:sp>
+      <p:sp>
+        <p:nvSpPr>
+          <p:cNvPr id="27" name="Rectangle 26">
+            <a:extLst>
+              <a:ext uri="{FF2B5EF4-FFF2-40B4-BE49-F238E27FC236}">
+                <a16:creationId xmlns:a16="http://schemas.microsoft.com/office/drawing/2014/main" id="{4CC2FCFD-CD85-ABFA-C2B8-F0F23F35D20E}"/>
+              </a:ext>
+            </a:extLst>
+          </p:cNvPr>
+          <p:cNvSpPr/>
+          <p:nvPr/>
+        </p:nvSpPr>
+        <p:spPr>
+          <a:xfrm>
+            <a:off x="6565232" y="5807358"/>
+            <a:ext cx="2019646" cy="134007"/>
+          </a:xfrm>
+          <a:prstGeom prst="rect">
+            <a:avLst/>
+          </a:prstGeom>
+        </p:spPr>
+        <p:style>
+          <a:lnRef idx="2">
+            <a:schemeClr val="accent2">
+              <a:shade val="15000"/>
+            </a:schemeClr>
+          </a:lnRef>
+          <a:fillRef idx="1">
+            <a:schemeClr val="accent2"/>
+          </a:fillRef>
+          <a:effectRef idx="0">
+            <a:schemeClr val="accent2"/>
+          </a:effectRef>
+          <a:fontRef idx="minor">
+            <a:schemeClr val="lt1"/>
+          </a:fontRef>
+        </p:style>
+        <p:txBody>
+          <a:bodyPr rtlCol="0" anchor="ctr"/>
+          <a:lstStyle/>
+          <a:p>
+            <a:pPr algn="ctr"/>
+            <a:endParaRPr lang="en-US" dirty="0"/>
+          </a:p>
+        </p:txBody>
+      </p:sp>
+    </p:spTree>
+    <p:extLst>
+      <p:ext uri="{BB962C8B-B14F-4D97-AF65-F5344CB8AC3E}">
+        <p14:creationId xmlns:p14="http://schemas.microsoft.com/office/powerpoint/2010/main" val="1764195459"/>
+      </p:ext>
+    </p:extLst>
+  </p:cSld>
+  <p:clrMapOvr>
+    <a:masterClrMapping/>
+  </p:clrMapOvr>
+</p:sld>
+</file>
+
+<file path=ppt/slides/slide8.xml><?xml version="1.0" encoding="utf-8"?>
 <p:sld xmlns:a="http://schemas.openxmlformats.org/drawingml/2006/main" xmlns:r="http://schemas.openxmlformats.org/officeDocument/2006/relationships" xmlns:p="http://schemas.openxmlformats.org/presentationml/2006/main">
   <p:cSld>
     <p:spTree>

--- a/My Azure Extension.pptx
+++ b/My Azure Extension.pptx
@@ -5183,6 +5183,58 @@
           </a:p>
         </p:txBody>
       </p:sp>
+      <p:sp>
+        <p:nvSpPr>
+          <p:cNvPr id="3" name="Rectangle 2">
+            <a:extLst>
+              <a:ext uri="{FF2B5EF4-FFF2-40B4-BE49-F238E27FC236}">
+                <a16:creationId xmlns:a16="http://schemas.microsoft.com/office/drawing/2014/main" id="{35CFF9F7-2D94-82D6-3082-74B5548A83BC}"/>
+              </a:ext>
+            </a:extLst>
+          </p:cNvPr>
+          <p:cNvSpPr/>
+          <p:nvPr/>
+        </p:nvSpPr>
+        <p:spPr>
+          <a:xfrm>
+            <a:off x="5495636" y="948402"/>
+            <a:ext cx="4068876" cy="5378507"/>
+          </a:xfrm>
+          <a:prstGeom prst="rect">
+            <a:avLst/>
+          </a:prstGeom>
+          <a:noFill/>
+          <a:ln w="50800">
+            <a:solidFill>
+              <a:srgbClr val="FF0000"/>
+            </a:solidFill>
+          </a:ln>
+        </p:spPr>
+        <p:style>
+          <a:lnRef idx="2">
+            <a:schemeClr val="accent1">
+              <a:shade val="50000"/>
+            </a:schemeClr>
+          </a:lnRef>
+          <a:fillRef idx="1">
+            <a:schemeClr val="accent1"/>
+          </a:fillRef>
+          <a:effectRef idx="0">
+            <a:schemeClr val="accent1"/>
+          </a:effectRef>
+          <a:fontRef idx="minor">
+            <a:schemeClr val="lt1"/>
+          </a:fontRef>
+        </p:style>
+        <p:txBody>
+          <a:bodyPr rtlCol="0" anchor="ctr"/>
+          <a:lstStyle/>
+          <a:p>
+            <a:pPr algn="ctr"/>
+            <a:endParaRPr lang="en-US"/>
+          </a:p>
+        </p:txBody>
+      </p:sp>
     </p:spTree>
     <p:extLst>
       <p:ext uri="{BB962C8B-B14F-4D97-AF65-F5344CB8AC3E}">

--- a/My Azure Extension.pptx
+++ b/My Azure Extension.pptx
@@ -6,13 +6,15 @@
   </p:sldMasterIdLst>
   <p:sldIdLst>
     <p:sldId id="258" r:id="rId2"/>
-    <p:sldId id="256" r:id="rId3"/>
-    <p:sldId id="257" r:id="rId4"/>
-    <p:sldId id="260" r:id="rId5"/>
-    <p:sldId id="259" r:id="rId6"/>
-    <p:sldId id="262" r:id="rId7"/>
-    <p:sldId id="263" r:id="rId8"/>
-    <p:sldId id="261" r:id="rId9"/>
+    <p:sldId id="264" r:id="rId3"/>
+    <p:sldId id="265" r:id="rId4"/>
+    <p:sldId id="256" r:id="rId5"/>
+    <p:sldId id="257" r:id="rId6"/>
+    <p:sldId id="260" r:id="rId7"/>
+    <p:sldId id="259" r:id="rId8"/>
+    <p:sldId id="262" r:id="rId9"/>
+    <p:sldId id="263" r:id="rId10"/>
+    <p:sldId id="261" r:id="rId11"/>
   </p:sldIdLst>
   <p:sldSz cx="12192000" cy="6858000"/>
   <p:notesSz cx="6858000" cy="9144000"/>
@@ -266,7 +268,7 @@
           <a:p>
             <a:fld id="{DD956615-4E69-4601-879E-C9C61DEA03B6}" type="datetimeFigureOut">
               <a:rPr lang="en-US" smtClean="0"/>
-              <a:t>7/25/2026</a:t>
+              <a:t>7/30/2026</a:t>
             </a:fld>
             <a:endParaRPr lang="en-US"/>
           </a:p>
@@ -464,7 +466,7 @@
           <a:p>
             <a:fld id="{DD956615-4E69-4601-879E-C9C61DEA03B6}" type="datetimeFigureOut">
               <a:rPr lang="en-US" smtClean="0"/>
-              <a:t>7/25/2026</a:t>
+              <a:t>7/30/2026</a:t>
             </a:fld>
             <a:endParaRPr lang="en-US"/>
           </a:p>
@@ -672,7 +674,7 @@
           <a:p>
             <a:fld id="{DD956615-4E69-4601-879E-C9C61DEA03B6}" type="datetimeFigureOut">
               <a:rPr lang="en-US" smtClean="0"/>
-              <a:t>7/25/2026</a:t>
+              <a:t>7/30/2026</a:t>
             </a:fld>
             <a:endParaRPr lang="en-US"/>
           </a:p>
@@ -870,7 +872,7 @@
           <a:p>
             <a:fld id="{DD956615-4E69-4601-879E-C9C61DEA03B6}" type="datetimeFigureOut">
               <a:rPr lang="en-US" smtClean="0"/>
-              <a:t>7/25/2026</a:t>
+              <a:t>7/30/2026</a:t>
             </a:fld>
             <a:endParaRPr lang="en-US"/>
           </a:p>
@@ -1145,7 +1147,7 @@
           <a:p>
             <a:fld id="{DD956615-4E69-4601-879E-C9C61DEA03B6}" type="datetimeFigureOut">
               <a:rPr lang="en-US" smtClean="0"/>
-              <a:t>7/25/2026</a:t>
+              <a:t>7/30/2026</a:t>
             </a:fld>
             <a:endParaRPr lang="en-US"/>
           </a:p>
@@ -1410,7 +1412,7 @@
           <a:p>
             <a:fld id="{DD956615-4E69-4601-879E-C9C61DEA03B6}" type="datetimeFigureOut">
               <a:rPr lang="en-US" smtClean="0"/>
-              <a:t>7/25/2026</a:t>
+              <a:t>7/30/2026</a:t>
             </a:fld>
             <a:endParaRPr lang="en-US"/>
           </a:p>
@@ -1822,7 +1824,7 @@
           <a:p>
             <a:fld id="{DD956615-4E69-4601-879E-C9C61DEA03B6}" type="datetimeFigureOut">
               <a:rPr lang="en-US" smtClean="0"/>
-              <a:t>7/25/2026</a:t>
+              <a:t>7/30/2026</a:t>
             </a:fld>
             <a:endParaRPr lang="en-US"/>
           </a:p>
@@ -1963,7 +1965,7 @@
           <a:p>
             <a:fld id="{DD956615-4E69-4601-879E-C9C61DEA03B6}" type="datetimeFigureOut">
               <a:rPr lang="en-US" smtClean="0"/>
-              <a:t>7/25/2026</a:t>
+              <a:t>7/30/2026</a:t>
             </a:fld>
             <a:endParaRPr lang="en-US"/>
           </a:p>
@@ -2076,7 +2078,7 @@
           <a:p>
             <a:fld id="{DD956615-4E69-4601-879E-C9C61DEA03B6}" type="datetimeFigureOut">
               <a:rPr lang="en-US" smtClean="0"/>
-              <a:t>7/25/2026</a:t>
+              <a:t>7/30/2026</a:t>
             </a:fld>
             <a:endParaRPr lang="en-US"/>
           </a:p>
@@ -2387,7 +2389,7 @@
           <a:p>
             <a:fld id="{DD956615-4E69-4601-879E-C9C61DEA03B6}" type="datetimeFigureOut">
               <a:rPr lang="en-US" smtClean="0"/>
-              <a:t>7/25/2026</a:t>
+              <a:t>7/30/2026</a:t>
             </a:fld>
             <a:endParaRPr lang="en-US"/>
           </a:p>
@@ -2675,7 +2677,7 @@
           <a:p>
             <a:fld id="{DD956615-4E69-4601-879E-C9C61DEA03B6}" type="datetimeFigureOut">
               <a:rPr lang="en-US" smtClean="0"/>
-              <a:t>7/25/2026</a:t>
+              <a:t>7/30/2026</a:t>
             </a:fld>
             <a:endParaRPr lang="en-US"/>
           </a:p>
@@ -2916,7 +2918,7 @@
           <a:p>
             <a:fld id="{DD956615-4E69-4601-879E-C9C61DEA03B6}" type="datetimeFigureOut">
               <a:rPr lang="en-US" smtClean="0"/>
-              <a:t>7/25/2026</a:t>
+              <a:t>7/30/2026</a:t>
             </a:fld>
             <a:endParaRPr lang="en-US"/>
           </a:p>
@@ -3426,6 +3428,118 @@
 </p:sld>
 </file>
 
+<file path=ppt/slides/slide10.xml><?xml version="1.0" encoding="utf-8"?>
+<p:sld xmlns:a="http://schemas.openxmlformats.org/drawingml/2006/main" xmlns:r="http://schemas.openxmlformats.org/officeDocument/2006/relationships" xmlns:p="http://schemas.openxmlformats.org/presentationml/2006/main">
+  <p:cSld>
+    <p:spTree>
+      <p:nvGrpSpPr>
+        <p:cNvPr id="1" name=""/>
+        <p:cNvGrpSpPr/>
+        <p:nvPr/>
+      </p:nvGrpSpPr>
+      <p:grpSpPr>
+        <a:xfrm>
+          <a:off x="0" y="0"/>
+          <a:ext cx="0" cy="0"/>
+          <a:chOff x="0" y="0"/>
+          <a:chExt cx="0" cy="0"/>
+        </a:xfrm>
+      </p:grpSpPr>
+      <p:pic>
+        <p:nvPicPr>
+          <p:cNvPr id="5" name="Picture 4">
+            <a:extLst>
+              <a:ext uri="{FF2B5EF4-FFF2-40B4-BE49-F238E27FC236}">
+                <a16:creationId xmlns:a16="http://schemas.microsoft.com/office/drawing/2014/main" id="{A8A65ECA-FC08-7DD1-42A4-B24B60D7F337}"/>
+              </a:ext>
+            </a:extLst>
+          </p:cNvPr>
+          <p:cNvPicPr>
+            <a:picLocks noChangeAspect="1"/>
+          </p:cNvPicPr>
+          <p:nvPr/>
+        </p:nvPicPr>
+        <p:blipFill>
+          <a:blip r:embed="rId2"/>
+          <a:stretch>
+            <a:fillRect/>
+          </a:stretch>
+        </p:blipFill>
+        <p:spPr>
+          <a:xfrm>
+            <a:off x="1274325" y="0"/>
+            <a:ext cx="9643350" cy="6858000"/>
+          </a:xfrm>
+          <a:prstGeom prst="rect">
+            <a:avLst/>
+          </a:prstGeom>
+        </p:spPr>
+      </p:pic>
+      <p:sp>
+        <p:nvSpPr>
+          <p:cNvPr id="6" name="Rectangle 5">
+            <a:extLst>
+              <a:ext uri="{FF2B5EF4-FFF2-40B4-BE49-F238E27FC236}">
+                <a16:creationId xmlns:a16="http://schemas.microsoft.com/office/drawing/2014/main" id="{E17D5DDC-8135-B562-2C52-9C1DF203AFFC}"/>
+              </a:ext>
+            </a:extLst>
+          </p:cNvPr>
+          <p:cNvSpPr/>
+          <p:nvPr/>
+        </p:nvSpPr>
+        <p:spPr>
+          <a:xfrm>
+            <a:off x="1339357" y="3429000"/>
+            <a:ext cx="9428981" cy="944217"/>
+          </a:xfrm>
+          <a:prstGeom prst="rect">
+            <a:avLst/>
+          </a:prstGeom>
+          <a:noFill/>
+          <a:ln w="50800">
+            <a:solidFill>
+              <a:srgbClr val="FF0000"/>
+            </a:solidFill>
+          </a:ln>
+        </p:spPr>
+        <p:style>
+          <a:lnRef idx="2">
+            <a:schemeClr val="accent1">
+              <a:shade val="50000"/>
+            </a:schemeClr>
+          </a:lnRef>
+          <a:fillRef idx="1">
+            <a:schemeClr val="accent1"/>
+          </a:fillRef>
+          <a:effectRef idx="0">
+            <a:schemeClr val="accent1"/>
+          </a:effectRef>
+          <a:fontRef idx="minor">
+            <a:schemeClr val="lt1"/>
+          </a:fontRef>
+        </p:style>
+        <p:txBody>
+          <a:bodyPr rtlCol="0" anchor="ctr"/>
+          <a:lstStyle/>
+          <a:p>
+            <a:pPr algn="ctr"/>
+            <a:endParaRPr lang="en-US"/>
+          </a:p>
+        </p:txBody>
+      </p:sp>
+    </p:spTree>
+    <p:extLst>
+      <p:ext uri="{BB962C8B-B14F-4D97-AF65-F5344CB8AC3E}">
+        <p14:creationId xmlns:p14="http://schemas.microsoft.com/office/powerpoint/2010/main" val="1053115456"/>
+      </p:ext>
+    </p:extLst>
+  </p:cSld>
+  <p:clrMapOvr>
+    <a:masterClrMapping/>
+  </p:clrMapOvr>
+</p:sld>
+</file>
+
 <file path=ppt/slides/slide2.xml><?xml version="1.0" encoding="utf-8"?>
 <p:sld xmlns:a="http://schemas.openxmlformats.org/drawingml/2006/main" xmlns:r="http://schemas.openxmlformats.org/officeDocument/2006/relationships" xmlns:p="http://schemas.openxmlformats.org/presentationml/2006/main">
   <p:cSld>
@@ -3448,7 +3562,7 @@
           <p:cNvPr id="5" name="Picture 4">
             <a:extLst>
               <a:ext uri="{FF2B5EF4-FFF2-40B4-BE49-F238E27FC236}">
-                <a16:creationId xmlns:a16="http://schemas.microsoft.com/office/drawing/2014/main" id="{D71D842A-4D27-427C-81B9-77CBDAC8AFE6}"/>
+                <a16:creationId xmlns:a16="http://schemas.microsoft.com/office/drawing/2014/main" id="{0A6D8B18-EDEF-5B54-F0B4-1B85C7873ED3}"/>
               </a:ext>
             </a:extLst>
           </p:cNvPr>
@@ -3465,50 +3579,20 @@
         </p:blipFill>
         <p:spPr>
           <a:xfrm>
-            <a:off x="874675" y="0"/>
-            <a:ext cx="10442649" cy="6858000"/>
+            <a:off x="2118757" y="790206"/>
+            <a:ext cx="7954485" cy="5277587"/>
           </a:xfrm>
           <a:prstGeom prst="rect">
             <a:avLst/>
           </a:prstGeom>
         </p:spPr>
       </p:pic>
-      <p:pic>
-        <p:nvPicPr>
-          <p:cNvPr id="4" name="Picture 3">
-            <a:extLst>
-              <a:ext uri="{FF2B5EF4-FFF2-40B4-BE49-F238E27FC236}">
-                <a16:creationId xmlns:a16="http://schemas.microsoft.com/office/drawing/2014/main" id="{E7A50CB4-D7F1-A697-A3D9-881E09E0FC0C}"/>
-              </a:ext>
-            </a:extLst>
-          </p:cNvPr>
-          <p:cNvPicPr>
-            <a:picLocks noChangeAspect="1"/>
-          </p:cNvPicPr>
-          <p:nvPr/>
-        </p:nvPicPr>
-        <p:blipFill>
-          <a:blip r:embed="rId3"/>
-          <a:stretch>
-            <a:fillRect/>
-          </a:stretch>
-        </p:blipFill>
-        <p:spPr>
-          <a:xfrm>
-            <a:off x="7256213" y="-28682"/>
-            <a:ext cx="3572374" cy="5677692"/>
-          </a:xfrm>
-          <a:prstGeom prst="rect">
-            <a:avLst/>
-          </a:prstGeom>
-        </p:spPr>
-      </p:pic>
-      <p:sp>
-        <p:nvSpPr>
-          <p:cNvPr id="6" name="Rectangle 5">
-            <a:extLst>
-              <a:ext uri="{FF2B5EF4-FFF2-40B4-BE49-F238E27FC236}">
-                <a16:creationId xmlns:a16="http://schemas.microsoft.com/office/drawing/2014/main" id="{29800BD0-FD8E-4466-B799-FADC20CA7751}"/>
+      <p:sp>
+        <p:nvSpPr>
+          <p:cNvPr id="7" name="Rectangle 6">
+            <a:extLst>
+              <a:ext uri="{FF2B5EF4-FFF2-40B4-BE49-F238E27FC236}">
+                <a16:creationId xmlns:a16="http://schemas.microsoft.com/office/drawing/2014/main" id="{C3FD898C-889B-CB7D-0F35-F96469E71000}"/>
               </a:ext>
             </a:extLst>
           </p:cNvPr>
@@ -3517,8 +3601,8 @@
         </p:nvSpPr>
         <p:spPr>
           <a:xfrm>
-            <a:off x="7389091" y="1208990"/>
-            <a:ext cx="3439496" cy="1691228"/>
+            <a:off x="4611421" y="3352023"/>
+            <a:ext cx="3947042" cy="329640"/>
           </a:xfrm>
           <a:prstGeom prst="rect">
             <a:avLst/>
@@ -3557,10 +3641,10 @@
       </p:sp>
       <p:sp>
         <p:nvSpPr>
-          <p:cNvPr id="7" name="Rectangle 6">
-            <a:extLst>
-              <a:ext uri="{FF2B5EF4-FFF2-40B4-BE49-F238E27FC236}">
-                <a16:creationId xmlns:a16="http://schemas.microsoft.com/office/drawing/2014/main" id="{4DC68636-D51D-A331-737C-8DE3CB1B9086}"/>
+          <p:cNvPr id="9" name="Rectangle 8">
+            <a:extLst>
+              <a:ext uri="{FF2B5EF4-FFF2-40B4-BE49-F238E27FC236}">
+                <a16:creationId xmlns:a16="http://schemas.microsoft.com/office/drawing/2014/main" id="{F4ACCE54-B30B-5244-1474-43638D9E6713}"/>
               </a:ext>
             </a:extLst>
           </p:cNvPr>
@@ -3569,8 +3653,8 @@
         </p:nvSpPr>
         <p:spPr>
           <a:xfrm>
-            <a:off x="7620000" y="1958109"/>
-            <a:ext cx="2706255" cy="166255"/>
+            <a:off x="6203592" y="3169799"/>
+            <a:ext cx="2151993" cy="134007"/>
           </a:xfrm>
           <a:prstGeom prst="rect">
             <a:avLst/>
@@ -3578,15 +3662,15 @@
         </p:spPr>
         <p:style>
           <a:lnRef idx="2">
-            <a:schemeClr val="accent1">
+            <a:schemeClr val="dk1">
               <a:shade val="15000"/>
             </a:schemeClr>
           </a:lnRef>
           <a:fillRef idx="1">
-            <a:schemeClr val="accent1"/>
+            <a:schemeClr val="dk1"/>
           </a:fillRef>
           <a:effectRef idx="0">
-            <a:schemeClr val="accent1"/>
+            <a:schemeClr val="dk1"/>
           </a:effectRef>
           <a:fontRef idx="minor">
             <a:schemeClr val="lt1"/>
@@ -3603,10 +3687,10 @@
       </p:sp>
       <p:sp>
         <p:nvSpPr>
-          <p:cNvPr id="2" name="Speech Bubble: Rectangle 1">
-            <a:extLst>
-              <a:ext uri="{FF2B5EF4-FFF2-40B4-BE49-F238E27FC236}">
-                <a16:creationId xmlns:a16="http://schemas.microsoft.com/office/drawing/2014/main" id="{AB62C5D2-3D80-4299-A136-6E7D5DE53E77}"/>
+          <p:cNvPr id="11" name="Rectangle 10">
+            <a:extLst>
+              <a:ext uri="{FF2B5EF4-FFF2-40B4-BE49-F238E27FC236}">
+                <a16:creationId xmlns:a16="http://schemas.microsoft.com/office/drawing/2014/main" id="{A9DAB3E5-AAD0-D5DF-B930-855FD3409157}"/>
               </a:ext>
             </a:extLst>
           </p:cNvPr>
@@ -3615,28 +3699,27 @@
         </p:nvSpPr>
         <p:spPr>
           <a:xfrm>
-            <a:off x="1734253" y="77815"/>
-            <a:ext cx="5521960" cy="4124729"/>
-          </a:xfrm>
-          <a:prstGeom prst="wedgeRectCallout">
-            <a:avLst>
-              <a:gd name="adj1" fmla="val 53856"/>
-              <a:gd name="adj2" fmla="val -17903"/>
-            </a:avLst>
+            <a:off x="6163488" y="2664473"/>
+            <a:ext cx="2151993" cy="134007"/>
+          </a:xfrm>
+          <a:prstGeom prst="rect">
+            <a:avLst/>
           </a:prstGeom>
         </p:spPr>
         <p:style>
           <a:lnRef idx="2">
-            <a:schemeClr val="accent1"/>
+            <a:schemeClr val="dk1">
+              <a:shade val="15000"/>
+            </a:schemeClr>
           </a:lnRef>
           <a:fillRef idx="1">
-            <a:schemeClr val="lt1"/>
+            <a:schemeClr val="dk1"/>
           </a:fillRef>
           <a:effectRef idx="0">
-            <a:schemeClr val="accent1"/>
+            <a:schemeClr val="dk1"/>
           </a:effectRef>
           <a:fontRef idx="minor">
-            <a:schemeClr val="dk1"/>
+            <a:schemeClr val="lt1"/>
           </a:fontRef>
         </p:style>
         <p:txBody>
@@ -3644,17 +3727,14 @@
           <a:lstStyle/>
           <a:p>
             <a:pPr algn="ctr"/>
-            <a:r>
-              <a:rPr lang="en-US" sz="3200" dirty="0"/>
-              <a:t>Background image</a:t>
-            </a:r>
+            <a:endParaRPr lang="en-US"/>
           </a:p>
         </p:txBody>
       </p:sp>
     </p:spTree>
     <p:extLst>
       <p:ext uri="{BB962C8B-B14F-4D97-AF65-F5344CB8AC3E}">
-        <p14:creationId xmlns:p14="http://schemas.microsoft.com/office/powerpoint/2010/main" val="1865525140"/>
+        <p14:creationId xmlns:p14="http://schemas.microsoft.com/office/powerpoint/2010/main" val="731533576"/>
       </p:ext>
     </p:extLst>
   </p:cSld>
@@ -3667,6 +3747,14 @@
 <file path=ppt/slides/slide3.xml><?xml version="1.0" encoding="utf-8"?>
 <p:sld xmlns:a="http://schemas.openxmlformats.org/drawingml/2006/main" xmlns:r="http://schemas.openxmlformats.org/officeDocument/2006/relationships" xmlns:p="http://schemas.openxmlformats.org/presentationml/2006/main">
   <p:cSld>
+    <p:bg>
+      <p:bgPr>
+        <a:solidFill>
+          <a:schemeClr val="bg1"/>
+        </a:solidFill>
+        <a:effectLst/>
+      </p:bgPr>
+    </p:bg>
     <p:spTree>
       <p:nvGrpSpPr>
         <p:cNvPr id="1" name=""/>
@@ -3683,10 +3771,10 @@
       </p:grpSpPr>
       <p:pic>
         <p:nvPicPr>
-          <p:cNvPr id="12" name="Picture 11">
-            <a:extLst>
-              <a:ext uri="{FF2B5EF4-FFF2-40B4-BE49-F238E27FC236}">
-                <a16:creationId xmlns:a16="http://schemas.microsoft.com/office/drawing/2014/main" id="{D3563561-FBA5-DF51-5ED2-F38549C4ABD0}"/>
+          <p:cNvPr id="5" name="Picture 4">
+            <a:extLst>
+              <a:ext uri="{FF2B5EF4-FFF2-40B4-BE49-F238E27FC236}">
+                <a16:creationId xmlns:a16="http://schemas.microsoft.com/office/drawing/2014/main" id="{CAF62AE5-9D1A-E1BC-707A-C8C18E0025B4}"/>
               </a:ext>
             </a:extLst>
           </p:cNvPr>
@@ -3703,50 +3791,20 @@
         </p:blipFill>
         <p:spPr>
           <a:xfrm>
-            <a:off x="6000713" y="302376"/>
-            <a:ext cx="5068007" cy="3200847"/>
+            <a:off x="2513319" y="643466"/>
+            <a:ext cx="7165361" cy="5571067"/>
           </a:xfrm>
           <a:prstGeom prst="rect">
             <a:avLst/>
           </a:prstGeom>
         </p:spPr>
       </p:pic>
-      <p:pic>
-        <p:nvPicPr>
-          <p:cNvPr id="8" name="Picture 7">
-            <a:extLst>
-              <a:ext uri="{FF2B5EF4-FFF2-40B4-BE49-F238E27FC236}">
-                <a16:creationId xmlns:a16="http://schemas.microsoft.com/office/drawing/2014/main" id="{05E6313B-176A-77F0-6FE3-0477799747E2}"/>
-              </a:ext>
-            </a:extLst>
-          </p:cNvPr>
-          <p:cNvPicPr>
-            <a:picLocks noChangeAspect="1"/>
-          </p:cNvPicPr>
-          <p:nvPr/>
-        </p:nvPicPr>
-        <p:blipFill>
-          <a:blip r:embed="rId3"/>
-          <a:stretch>
-            <a:fillRect/>
-          </a:stretch>
-        </p:blipFill>
-        <p:spPr>
-          <a:xfrm>
-            <a:off x="2393122" y="302376"/>
-            <a:ext cx="3581900" cy="5772956"/>
-          </a:xfrm>
-          <a:prstGeom prst="rect">
-            <a:avLst/>
-          </a:prstGeom>
-        </p:spPr>
-      </p:pic>
-      <p:sp>
-        <p:nvSpPr>
-          <p:cNvPr id="11" name="Rectangle 10">
-            <a:extLst>
-              <a:ext uri="{FF2B5EF4-FFF2-40B4-BE49-F238E27FC236}">
-                <a16:creationId xmlns:a16="http://schemas.microsoft.com/office/drawing/2014/main" id="{F11C9E16-25F2-4235-8243-E88108DE2B4F}"/>
+      <p:sp>
+        <p:nvSpPr>
+          <p:cNvPr id="7" name="Rectangle 6">
+            <a:extLst>
+              <a:ext uri="{FF2B5EF4-FFF2-40B4-BE49-F238E27FC236}">
+                <a16:creationId xmlns:a16="http://schemas.microsoft.com/office/drawing/2014/main" id="{120BF7B8-3DFB-5F63-62BE-BBA8C41BAFF8}"/>
               </a:ext>
             </a:extLst>
           </p:cNvPr>
@@ -3755,8 +3813,8 @@
         </p:nvSpPr>
         <p:spPr>
           <a:xfrm>
-            <a:off x="2461779" y="3279833"/>
-            <a:ext cx="3366366" cy="1781694"/>
+            <a:off x="4587357" y="3761096"/>
+            <a:ext cx="3947042" cy="241409"/>
           </a:xfrm>
           <a:prstGeom prst="rect">
             <a:avLst/>
@@ -3795,10 +3853,10 @@
       </p:sp>
       <p:sp>
         <p:nvSpPr>
-          <p:cNvPr id="13" name="Rectangle 12">
-            <a:extLst>
-              <a:ext uri="{FF2B5EF4-FFF2-40B4-BE49-F238E27FC236}">
-                <a16:creationId xmlns:a16="http://schemas.microsoft.com/office/drawing/2014/main" id="{50F56E79-6F57-432C-8B96-FC38980B61B0}"/>
+          <p:cNvPr id="9" name="Rectangle 8">
+            <a:extLst>
+              <a:ext uri="{FF2B5EF4-FFF2-40B4-BE49-F238E27FC236}">
+                <a16:creationId xmlns:a16="http://schemas.microsoft.com/office/drawing/2014/main" id="{8919FE85-F48E-0B1C-2C80-D67FDED7FB24}"/>
               </a:ext>
             </a:extLst>
           </p:cNvPr>
@@ -3807,8 +3865,8 @@
         </p:nvSpPr>
         <p:spPr>
           <a:xfrm>
-            <a:off x="8954805" y="302376"/>
-            <a:ext cx="2113915" cy="397704"/>
+            <a:off x="7852611" y="584759"/>
+            <a:ext cx="1876926" cy="401829"/>
           </a:xfrm>
           <a:prstGeom prst="rect">
             <a:avLst/>
@@ -3847,10 +3905,10 @@
       </p:sp>
       <p:sp>
         <p:nvSpPr>
-          <p:cNvPr id="2" name="Speech Bubble: Rectangle 1">
-            <a:extLst>
-              <a:ext uri="{FF2B5EF4-FFF2-40B4-BE49-F238E27FC236}">
-                <a16:creationId xmlns:a16="http://schemas.microsoft.com/office/drawing/2014/main" id="{2442C75B-2E5C-4E74-B151-489562C786CC}"/>
+          <p:cNvPr id="11" name="Rectangle 10">
+            <a:extLst>
+              <a:ext uri="{FF2B5EF4-FFF2-40B4-BE49-F238E27FC236}">
+                <a16:creationId xmlns:a16="http://schemas.microsoft.com/office/drawing/2014/main" id="{C294083A-60DA-8ADF-3316-68E2796E341C}"/>
               </a:ext>
             </a:extLst>
           </p:cNvPr>
@@ -3859,28 +3917,27 @@
         </p:nvSpPr>
         <p:spPr>
           <a:xfrm>
-            <a:off x="5143731" y="1221522"/>
-            <a:ext cx="5521960" cy="949960"/>
-          </a:xfrm>
-          <a:prstGeom prst="wedgeRectCallout">
-            <a:avLst>
-              <a:gd name="adj1" fmla="val 40809"/>
-              <a:gd name="adj2" fmla="val -94262"/>
-            </a:avLst>
+            <a:off x="6095999" y="3153757"/>
+            <a:ext cx="2151993" cy="134007"/>
+          </a:xfrm>
+          <a:prstGeom prst="rect">
+            <a:avLst/>
           </a:prstGeom>
         </p:spPr>
         <p:style>
           <a:lnRef idx="2">
-            <a:schemeClr val="accent1"/>
+            <a:schemeClr val="dk1">
+              <a:shade val="15000"/>
+            </a:schemeClr>
           </a:lnRef>
           <a:fillRef idx="1">
-            <a:schemeClr val="lt1"/>
+            <a:schemeClr val="dk1"/>
           </a:fillRef>
           <a:effectRef idx="0">
-            <a:schemeClr val="accent1"/>
+            <a:schemeClr val="dk1"/>
           </a:effectRef>
           <a:fontRef idx="minor">
-            <a:schemeClr val="dk1"/>
+            <a:schemeClr val="lt1"/>
           </a:fontRef>
         </p:style>
         <p:txBody>
@@ -3888,24 +3945,106 @@
           <a:lstStyle/>
           <a:p>
             <a:pPr algn="ctr"/>
-            <a:r>
-              <a:rPr lang="en-US" sz="3200" dirty="0"/>
-              <a:t>Mask your username and </a:t>
-            </a:r>
-          </a:p>
+            <a:endParaRPr lang="en-US"/>
+          </a:p>
+        </p:txBody>
+      </p:sp>
+      <p:sp>
+        <p:nvSpPr>
+          <p:cNvPr id="13" name="Rectangle 12">
+            <a:extLst>
+              <a:ext uri="{FF2B5EF4-FFF2-40B4-BE49-F238E27FC236}">
+                <a16:creationId xmlns:a16="http://schemas.microsoft.com/office/drawing/2014/main" id="{7DA84231-3B16-D383-2D55-BDBA28680446}"/>
+              </a:ext>
+            </a:extLst>
+          </p:cNvPr>
+          <p:cNvSpPr/>
+          <p:nvPr/>
+        </p:nvSpPr>
+        <p:spPr>
+          <a:xfrm>
+            <a:off x="6095999" y="3586116"/>
+            <a:ext cx="2151993" cy="134007"/>
+          </a:xfrm>
+          <a:prstGeom prst="rect">
+            <a:avLst/>
+          </a:prstGeom>
+        </p:spPr>
+        <p:style>
+          <a:lnRef idx="2">
+            <a:schemeClr val="dk1">
+              <a:shade val="15000"/>
+            </a:schemeClr>
+          </a:lnRef>
+          <a:fillRef idx="1">
+            <a:schemeClr val="dk1"/>
+          </a:fillRef>
+          <a:effectRef idx="0">
+            <a:schemeClr val="dk1"/>
+          </a:effectRef>
+          <a:fontRef idx="minor">
+            <a:schemeClr val="lt1"/>
+          </a:fontRef>
+        </p:style>
+        <p:txBody>
+          <a:bodyPr rtlCol="0" anchor="ctr"/>
+          <a:lstStyle/>
           <a:p>
             <a:pPr algn="ctr"/>
-            <a:r>
-              <a:rPr lang="en-US" sz="3200" dirty="0"/>
-              <a:t>Entra ID tenant name</a:t>
-            </a:r>
+            <a:endParaRPr lang="en-US"/>
+          </a:p>
+        </p:txBody>
+      </p:sp>
+      <p:sp>
+        <p:nvSpPr>
+          <p:cNvPr id="15" name="Rectangle 14">
+            <a:extLst>
+              <a:ext uri="{FF2B5EF4-FFF2-40B4-BE49-F238E27FC236}">
+                <a16:creationId xmlns:a16="http://schemas.microsoft.com/office/drawing/2014/main" id="{631BF738-F5F2-5BD3-68CC-BBBFD417378E}"/>
+              </a:ext>
+            </a:extLst>
+          </p:cNvPr>
+          <p:cNvSpPr/>
+          <p:nvPr/>
+        </p:nvSpPr>
+        <p:spPr>
+          <a:xfrm>
+            <a:off x="2839451" y="1308915"/>
+            <a:ext cx="2151993" cy="134007"/>
+          </a:xfrm>
+          <a:prstGeom prst="rect">
+            <a:avLst/>
+          </a:prstGeom>
+        </p:spPr>
+        <p:style>
+          <a:lnRef idx="2">
+            <a:schemeClr val="dk1">
+              <a:shade val="15000"/>
+            </a:schemeClr>
+          </a:lnRef>
+          <a:fillRef idx="1">
+            <a:schemeClr val="dk1"/>
+          </a:fillRef>
+          <a:effectRef idx="0">
+            <a:schemeClr val="dk1"/>
+          </a:effectRef>
+          <a:fontRef idx="minor">
+            <a:schemeClr val="lt1"/>
+          </a:fontRef>
+        </p:style>
+        <p:txBody>
+          <a:bodyPr rtlCol="0" anchor="ctr"/>
+          <a:lstStyle/>
+          <a:p>
+            <a:pPr algn="ctr"/>
+            <a:endParaRPr lang="en-US"/>
           </a:p>
         </p:txBody>
       </p:sp>
     </p:spTree>
     <p:extLst>
       <p:ext uri="{BB962C8B-B14F-4D97-AF65-F5344CB8AC3E}">
-        <p14:creationId xmlns:p14="http://schemas.microsoft.com/office/powerpoint/2010/main" val="4272083939"/>
+        <p14:creationId xmlns:p14="http://schemas.microsoft.com/office/powerpoint/2010/main" val="1202229844"/>
       </p:ext>
     </p:extLst>
   </p:cSld>
@@ -3934,10 +4073,10 @@
       </p:grpSpPr>
       <p:pic>
         <p:nvPicPr>
-          <p:cNvPr id="11" name="Picture 10">
-            <a:extLst>
-              <a:ext uri="{FF2B5EF4-FFF2-40B4-BE49-F238E27FC236}">
-                <a16:creationId xmlns:a16="http://schemas.microsoft.com/office/drawing/2014/main" id="{B594DBF4-4EB6-47E6-813C-A889F99EBBAB}"/>
+          <p:cNvPr id="5" name="Picture 4">
+            <a:extLst>
+              <a:ext uri="{FF2B5EF4-FFF2-40B4-BE49-F238E27FC236}">
+                <a16:creationId xmlns:a16="http://schemas.microsoft.com/office/drawing/2014/main" id="{D71D842A-4D27-427C-81B9-77CBDAC8AFE6}"/>
               </a:ext>
             </a:extLst>
           </p:cNvPr>
@@ -3954,8 +4093,8 @@
         </p:blipFill>
         <p:spPr>
           <a:xfrm>
-            <a:off x="4927600" y="3274087"/>
-            <a:ext cx="6709410" cy="3484985"/>
+            <a:off x="874675" y="0"/>
+            <a:ext cx="10442649" cy="6858000"/>
           </a:xfrm>
           <a:prstGeom prst="rect">
             <a:avLst/>
@@ -3964,10 +4103,10 @@
       </p:pic>
       <p:pic>
         <p:nvPicPr>
-          <p:cNvPr id="3" name="Picture 2">
-            <a:extLst>
-              <a:ext uri="{FF2B5EF4-FFF2-40B4-BE49-F238E27FC236}">
-                <a16:creationId xmlns:a16="http://schemas.microsoft.com/office/drawing/2014/main" id="{4F22709B-CD76-40DB-A00D-5302FDCF1A00}"/>
+          <p:cNvPr id="4" name="Picture 3">
+            <a:extLst>
+              <a:ext uri="{FF2B5EF4-FFF2-40B4-BE49-F238E27FC236}">
+                <a16:creationId xmlns:a16="http://schemas.microsoft.com/office/drawing/2014/main" id="{E7A50CB4-D7F1-A697-A3D9-881E09E0FC0C}"/>
               </a:ext>
             </a:extLst>
           </p:cNvPr>
@@ -3984,8 +4123,8 @@
         </p:blipFill>
         <p:spPr>
           <a:xfrm>
-            <a:off x="874676" y="218440"/>
-            <a:ext cx="6894572" cy="4527872"/>
+            <a:off x="7256213" y="-28682"/>
+            <a:ext cx="3572374" cy="5677692"/>
           </a:xfrm>
           <a:prstGeom prst="rect">
             <a:avLst/>
@@ -3994,10 +4133,10 @@
       </p:pic>
       <p:sp>
         <p:nvSpPr>
-          <p:cNvPr id="5" name="Rectangle 4">
-            <a:extLst>
-              <a:ext uri="{FF2B5EF4-FFF2-40B4-BE49-F238E27FC236}">
-                <a16:creationId xmlns:a16="http://schemas.microsoft.com/office/drawing/2014/main" id="{41B1B28F-6CB7-4AFF-96B5-8F66FB20F53F}"/>
+          <p:cNvPr id="6" name="Rectangle 5">
+            <a:extLst>
+              <a:ext uri="{FF2B5EF4-FFF2-40B4-BE49-F238E27FC236}">
+                <a16:creationId xmlns:a16="http://schemas.microsoft.com/office/drawing/2014/main" id="{29800BD0-FD8E-4466-B799-FADC20CA7751}"/>
               </a:ext>
             </a:extLst>
           </p:cNvPr>
@@ -4006,8 +4145,8 @@
         </p:nvSpPr>
         <p:spPr>
           <a:xfrm>
-            <a:off x="4202759" y="218440"/>
-            <a:ext cx="3566489" cy="1022350"/>
+            <a:off x="7389091" y="1208990"/>
+            <a:ext cx="3439496" cy="1691228"/>
           </a:xfrm>
           <a:prstGeom prst="rect">
             <a:avLst/>
@@ -4046,10 +4185,10 @@
       </p:sp>
       <p:sp>
         <p:nvSpPr>
-          <p:cNvPr id="7" name="Speech Bubble: Rectangle 6">
-            <a:extLst>
-              <a:ext uri="{FF2B5EF4-FFF2-40B4-BE49-F238E27FC236}">
-                <a16:creationId xmlns:a16="http://schemas.microsoft.com/office/drawing/2014/main" id="{EE701471-693E-4C55-A489-902B40991E7E}"/>
+          <p:cNvPr id="7" name="Rectangle 6">
+            <a:extLst>
+              <a:ext uri="{FF2B5EF4-FFF2-40B4-BE49-F238E27FC236}">
+                <a16:creationId xmlns:a16="http://schemas.microsoft.com/office/drawing/2014/main" id="{4DC68636-D51D-A331-737C-8DE3CB1B9086}"/>
               </a:ext>
             </a:extLst>
           </p:cNvPr>
@@ -4058,13 +4197,59 @@
         </p:nvSpPr>
         <p:spPr>
           <a:xfrm>
-            <a:off x="228600" y="1102360"/>
-            <a:ext cx="5521960" cy="949960"/>
+            <a:off x="7620000" y="1958109"/>
+            <a:ext cx="2706255" cy="166255"/>
+          </a:xfrm>
+          <a:prstGeom prst="rect">
+            <a:avLst/>
+          </a:prstGeom>
+        </p:spPr>
+        <p:style>
+          <a:lnRef idx="2">
+            <a:schemeClr val="accent1">
+              <a:shade val="15000"/>
+            </a:schemeClr>
+          </a:lnRef>
+          <a:fillRef idx="1">
+            <a:schemeClr val="accent1"/>
+          </a:fillRef>
+          <a:effectRef idx="0">
+            <a:schemeClr val="accent1"/>
+          </a:effectRef>
+          <a:fontRef idx="minor">
+            <a:schemeClr val="lt1"/>
+          </a:fontRef>
+        </p:style>
+        <p:txBody>
+          <a:bodyPr rtlCol="0" anchor="ctr"/>
+          <a:lstStyle/>
+          <a:p>
+            <a:pPr algn="ctr"/>
+            <a:endParaRPr lang="en-US"/>
+          </a:p>
+        </p:txBody>
+      </p:sp>
+      <p:sp>
+        <p:nvSpPr>
+          <p:cNvPr id="2" name="Speech Bubble: Rectangle 1">
+            <a:extLst>
+              <a:ext uri="{FF2B5EF4-FFF2-40B4-BE49-F238E27FC236}">
+                <a16:creationId xmlns:a16="http://schemas.microsoft.com/office/drawing/2014/main" id="{AB62C5D2-3D80-4299-A136-6E7D5DE53E77}"/>
+              </a:ext>
+            </a:extLst>
+          </p:cNvPr>
+          <p:cNvSpPr/>
+          <p:nvPr/>
+        </p:nvSpPr>
+        <p:spPr>
+          <a:xfrm>
+            <a:off x="1734253" y="77815"/>
+            <a:ext cx="5521960" cy="4124729"/>
           </a:xfrm>
           <a:prstGeom prst="wedgeRectCallout">
             <a:avLst>
-              <a:gd name="adj1" fmla="val 40809"/>
-              <a:gd name="adj2" fmla="val -94262"/>
+              <a:gd name="adj1" fmla="val 53856"/>
+              <a:gd name="adj2" fmla="val -17903"/>
             </a:avLst>
           </a:prstGeom>
         </p:spPr>
@@ -4089,116 +4274,7 @@
             <a:pPr algn="ctr"/>
             <a:r>
               <a:rPr lang="en-US" sz="3200" dirty="0"/>
-              <a:t>Setup background image</a:t>
-            </a:r>
-          </a:p>
-        </p:txBody>
-      </p:sp>
-      <p:sp>
-        <p:nvSpPr>
-          <p:cNvPr id="17" name="Rectangle 16">
-            <a:extLst>
-              <a:ext uri="{FF2B5EF4-FFF2-40B4-BE49-F238E27FC236}">
-                <a16:creationId xmlns:a16="http://schemas.microsoft.com/office/drawing/2014/main" id="{7DE7BA4F-386A-4D81-8AB9-830AEEE64F91}"/>
-              </a:ext>
-            </a:extLst>
-          </p:cNvPr>
-          <p:cNvSpPr/>
-          <p:nvPr/>
-        </p:nvSpPr>
-        <p:spPr>
-          <a:xfrm>
-            <a:off x="9204961" y="3303235"/>
-            <a:ext cx="2432050" cy="537245"/>
-          </a:xfrm>
-          <a:prstGeom prst="rect">
-            <a:avLst/>
-          </a:prstGeom>
-          <a:noFill/>
-          <a:ln w="50800">
-            <a:solidFill>
-              <a:srgbClr val="FF0000"/>
-            </a:solidFill>
-          </a:ln>
-        </p:spPr>
-        <p:style>
-          <a:lnRef idx="2">
-            <a:schemeClr val="accent1">
-              <a:shade val="50000"/>
-            </a:schemeClr>
-          </a:lnRef>
-          <a:fillRef idx="1">
-            <a:schemeClr val="accent1"/>
-          </a:fillRef>
-          <a:effectRef idx="0">
-            <a:schemeClr val="accent1"/>
-          </a:effectRef>
-          <a:fontRef idx="minor">
-            <a:schemeClr val="lt1"/>
-          </a:fontRef>
-        </p:style>
-        <p:txBody>
-          <a:bodyPr rtlCol="0" anchor="ctr"/>
-          <a:lstStyle/>
-          <a:p>
-            <a:pPr algn="ctr"/>
-            <a:endParaRPr lang="en-US"/>
-          </a:p>
-        </p:txBody>
-      </p:sp>
-      <p:sp>
-        <p:nvSpPr>
-          <p:cNvPr id="21" name="Speech Bubble: Rectangle 20">
-            <a:extLst>
-              <a:ext uri="{FF2B5EF4-FFF2-40B4-BE49-F238E27FC236}">
-                <a16:creationId xmlns:a16="http://schemas.microsoft.com/office/drawing/2014/main" id="{4784EDEC-B45E-4732-AE8B-A69F8620BBA8}"/>
-              </a:ext>
-            </a:extLst>
-          </p:cNvPr>
-          <p:cNvSpPr/>
-          <p:nvPr/>
-        </p:nvSpPr>
-        <p:spPr>
-          <a:xfrm>
-            <a:off x="5604839" y="5062247"/>
-            <a:ext cx="5521960" cy="949960"/>
-          </a:xfrm>
-          <a:prstGeom prst="wedgeRectCallout">
-            <a:avLst>
-              <a:gd name="adj1" fmla="val 44857"/>
-              <a:gd name="adj2" fmla="val -172872"/>
-            </a:avLst>
-          </a:prstGeom>
-        </p:spPr>
-        <p:style>
-          <a:lnRef idx="2">
-            <a:schemeClr val="accent1"/>
-          </a:lnRef>
-          <a:fillRef idx="1">
-            <a:schemeClr val="lt1"/>
-          </a:fillRef>
-          <a:effectRef idx="0">
-            <a:schemeClr val="accent1"/>
-          </a:effectRef>
-          <a:fontRef idx="minor">
-            <a:schemeClr val="dk1"/>
-          </a:fontRef>
-        </p:style>
-        <p:txBody>
-          <a:bodyPr rtlCol="0" anchor="ctr"/>
-          <a:lstStyle/>
-          <a:p>
-            <a:pPr algn="ctr"/>
-            <a:r>
-              <a:rPr lang="en-US" sz="3200" dirty="0"/>
-              <a:t>Mask your username and </a:t>
-            </a:r>
-          </a:p>
-          <a:p>
-            <a:pPr algn="ctr"/>
-            <a:r>
-              <a:rPr lang="en-US" sz="3200" dirty="0"/>
-              <a:t>Azure AD tenant name</a:t>
+              <a:t>Background image</a:t>
             </a:r>
           </a:p>
         </p:txBody>
@@ -4206,7 +4282,7 @@
     </p:spTree>
     <p:extLst>
       <p:ext uri="{BB962C8B-B14F-4D97-AF65-F5344CB8AC3E}">
-        <p14:creationId xmlns:p14="http://schemas.microsoft.com/office/powerpoint/2010/main" val="2453888186"/>
+        <p14:creationId xmlns:p14="http://schemas.microsoft.com/office/powerpoint/2010/main" val="1865525140"/>
       </p:ext>
     </p:extLst>
   </p:cSld>
@@ -4235,10 +4311,10 @@
       </p:grpSpPr>
       <p:pic>
         <p:nvPicPr>
-          <p:cNvPr id="5" name="Picture 4">
-            <a:extLst>
-              <a:ext uri="{FF2B5EF4-FFF2-40B4-BE49-F238E27FC236}">
-                <a16:creationId xmlns:a16="http://schemas.microsoft.com/office/drawing/2014/main" id="{AB1613B9-069B-DFB0-8D3E-0F52AA2D8DAB}"/>
+          <p:cNvPr id="12" name="Picture 11">
+            <a:extLst>
+              <a:ext uri="{FF2B5EF4-FFF2-40B4-BE49-F238E27FC236}">
+                <a16:creationId xmlns:a16="http://schemas.microsoft.com/office/drawing/2014/main" id="{D3563561-FBA5-DF51-5ED2-F38549C4ABD0}"/>
               </a:ext>
             </a:extLst>
           </p:cNvPr>
@@ -4255,20 +4331,50 @@
         </p:blipFill>
         <p:spPr>
           <a:xfrm>
-            <a:off x="2276475" y="185737"/>
-            <a:ext cx="7639050" cy="6486525"/>
+            <a:off x="6000713" y="302376"/>
+            <a:ext cx="5068007" cy="3200847"/>
           </a:xfrm>
           <a:prstGeom prst="rect">
             <a:avLst/>
           </a:prstGeom>
         </p:spPr>
       </p:pic>
-      <p:sp>
-        <p:nvSpPr>
-          <p:cNvPr id="6" name="Rectangle 5">
-            <a:extLst>
-              <a:ext uri="{FF2B5EF4-FFF2-40B4-BE49-F238E27FC236}">
-                <a16:creationId xmlns:a16="http://schemas.microsoft.com/office/drawing/2014/main" id="{6B9733BF-CA1F-3F6F-6D33-4CAAC202B920}"/>
+      <p:pic>
+        <p:nvPicPr>
+          <p:cNvPr id="8" name="Picture 7">
+            <a:extLst>
+              <a:ext uri="{FF2B5EF4-FFF2-40B4-BE49-F238E27FC236}">
+                <a16:creationId xmlns:a16="http://schemas.microsoft.com/office/drawing/2014/main" id="{05E6313B-176A-77F0-6FE3-0477799747E2}"/>
+              </a:ext>
+            </a:extLst>
+          </p:cNvPr>
+          <p:cNvPicPr>
+            <a:picLocks noChangeAspect="1"/>
+          </p:cNvPicPr>
+          <p:nvPr/>
+        </p:nvPicPr>
+        <p:blipFill>
+          <a:blip r:embed="rId3"/>
+          <a:stretch>
+            <a:fillRect/>
+          </a:stretch>
+        </p:blipFill>
+        <p:spPr>
+          <a:xfrm>
+            <a:off x="2393122" y="302376"/>
+            <a:ext cx="3581900" cy="5772956"/>
+          </a:xfrm>
+          <a:prstGeom prst="rect">
+            <a:avLst/>
+          </a:prstGeom>
+        </p:spPr>
+      </p:pic>
+      <p:sp>
+        <p:nvSpPr>
+          <p:cNvPr id="11" name="Rectangle 10">
+            <a:extLst>
+              <a:ext uri="{FF2B5EF4-FFF2-40B4-BE49-F238E27FC236}">
+                <a16:creationId xmlns:a16="http://schemas.microsoft.com/office/drawing/2014/main" id="{F11C9E16-25F2-4235-8243-E88108DE2B4F}"/>
               </a:ext>
             </a:extLst>
           </p:cNvPr>
@@ -4277,8 +4383,8 @@
         </p:nvSpPr>
         <p:spPr>
           <a:xfrm>
-            <a:off x="7615327" y="51179"/>
-            <a:ext cx="886889" cy="914337"/>
+            <a:off x="2461779" y="3279833"/>
+            <a:ext cx="3366366" cy="1781694"/>
           </a:xfrm>
           <a:prstGeom prst="rect">
             <a:avLst/>
@@ -4317,10 +4423,10 @@
       </p:sp>
       <p:sp>
         <p:nvSpPr>
-          <p:cNvPr id="7" name="Rectangle 6">
-            <a:extLst>
-              <a:ext uri="{FF2B5EF4-FFF2-40B4-BE49-F238E27FC236}">
-                <a16:creationId xmlns:a16="http://schemas.microsoft.com/office/drawing/2014/main" id="{259BC57D-EE86-1E1D-6703-FCDD09159298}"/>
+          <p:cNvPr id="13" name="Rectangle 12">
+            <a:extLst>
+              <a:ext uri="{FF2B5EF4-FFF2-40B4-BE49-F238E27FC236}">
+                <a16:creationId xmlns:a16="http://schemas.microsoft.com/office/drawing/2014/main" id="{50F56E79-6F57-432C-8B96-FC38980B61B0}"/>
               </a:ext>
             </a:extLst>
           </p:cNvPr>
@@ -4329,8 +4435,8 @@
         </p:nvSpPr>
         <p:spPr>
           <a:xfrm>
-            <a:off x="2276475" y="4258744"/>
-            <a:ext cx="5998561" cy="914337"/>
+            <a:off x="8954805" y="302376"/>
+            <a:ext cx="2113915" cy="397704"/>
           </a:xfrm>
           <a:prstGeom prst="rect">
             <a:avLst/>
@@ -4367,10 +4473,67 @@
           </a:p>
         </p:txBody>
       </p:sp>
+      <p:sp>
+        <p:nvSpPr>
+          <p:cNvPr id="2" name="Speech Bubble: Rectangle 1">
+            <a:extLst>
+              <a:ext uri="{FF2B5EF4-FFF2-40B4-BE49-F238E27FC236}">
+                <a16:creationId xmlns:a16="http://schemas.microsoft.com/office/drawing/2014/main" id="{2442C75B-2E5C-4E74-B151-489562C786CC}"/>
+              </a:ext>
+            </a:extLst>
+          </p:cNvPr>
+          <p:cNvSpPr/>
+          <p:nvPr/>
+        </p:nvSpPr>
+        <p:spPr>
+          <a:xfrm>
+            <a:off x="5143731" y="1221522"/>
+            <a:ext cx="5521960" cy="949960"/>
+          </a:xfrm>
+          <a:prstGeom prst="wedgeRectCallout">
+            <a:avLst>
+              <a:gd name="adj1" fmla="val 40809"/>
+              <a:gd name="adj2" fmla="val -94262"/>
+            </a:avLst>
+          </a:prstGeom>
+        </p:spPr>
+        <p:style>
+          <a:lnRef idx="2">
+            <a:schemeClr val="accent1"/>
+          </a:lnRef>
+          <a:fillRef idx="1">
+            <a:schemeClr val="lt1"/>
+          </a:fillRef>
+          <a:effectRef idx="0">
+            <a:schemeClr val="accent1"/>
+          </a:effectRef>
+          <a:fontRef idx="minor">
+            <a:schemeClr val="dk1"/>
+          </a:fontRef>
+        </p:style>
+        <p:txBody>
+          <a:bodyPr rtlCol="0" anchor="ctr"/>
+          <a:lstStyle/>
+          <a:p>
+            <a:pPr algn="ctr"/>
+            <a:r>
+              <a:rPr lang="en-US" sz="3200" dirty="0"/>
+              <a:t>Mask your username and </a:t>
+            </a:r>
+          </a:p>
+          <a:p>
+            <a:pPr algn="ctr"/>
+            <a:r>
+              <a:rPr lang="en-US" sz="3200" dirty="0"/>
+              <a:t>Entra ID tenant name</a:t>
+            </a:r>
+          </a:p>
+        </p:txBody>
+      </p:sp>
     </p:spTree>
     <p:extLst>
       <p:ext uri="{BB962C8B-B14F-4D97-AF65-F5344CB8AC3E}">
-        <p14:creationId xmlns:p14="http://schemas.microsoft.com/office/powerpoint/2010/main" val="3555942452"/>
+        <p14:creationId xmlns:p14="http://schemas.microsoft.com/office/powerpoint/2010/main" val="4272083939"/>
       </p:ext>
     </p:extLst>
   </p:cSld>
@@ -4399,10 +4562,10 @@
       </p:grpSpPr>
       <p:pic>
         <p:nvPicPr>
-          <p:cNvPr id="3" name="Picture 2">
-            <a:extLst>
-              <a:ext uri="{FF2B5EF4-FFF2-40B4-BE49-F238E27FC236}">
-                <a16:creationId xmlns:a16="http://schemas.microsoft.com/office/drawing/2014/main" id="{4386F712-283E-CDC2-FF63-BE9347234A31}"/>
+          <p:cNvPr id="11" name="Picture 10">
+            <a:extLst>
+              <a:ext uri="{FF2B5EF4-FFF2-40B4-BE49-F238E27FC236}">
+                <a16:creationId xmlns:a16="http://schemas.microsoft.com/office/drawing/2014/main" id="{B594DBF4-4EB6-47E6-813C-A889F99EBBAB}"/>
               </a:ext>
             </a:extLst>
           </p:cNvPr>
@@ -4419,20 +4582,50 @@
         </p:blipFill>
         <p:spPr>
           <a:xfrm>
-            <a:off x="4295523" y="580627"/>
-            <a:ext cx="3600953" cy="5696745"/>
+            <a:off x="4927600" y="3274087"/>
+            <a:ext cx="6709410" cy="3484985"/>
           </a:xfrm>
           <a:prstGeom prst="rect">
             <a:avLst/>
           </a:prstGeom>
         </p:spPr>
       </p:pic>
-      <p:sp>
-        <p:nvSpPr>
-          <p:cNvPr id="7" name="Rectangle 6">
-            <a:extLst>
-              <a:ext uri="{FF2B5EF4-FFF2-40B4-BE49-F238E27FC236}">
-                <a16:creationId xmlns:a16="http://schemas.microsoft.com/office/drawing/2014/main" id="{7B0DC751-7AA6-9733-67FD-907CA822C892}"/>
+      <p:pic>
+        <p:nvPicPr>
+          <p:cNvPr id="3" name="Picture 2">
+            <a:extLst>
+              <a:ext uri="{FF2B5EF4-FFF2-40B4-BE49-F238E27FC236}">
+                <a16:creationId xmlns:a16="http://schemas.microsoft.com/office/drawing/2014/main" id="{4F22709B-CD76-40DB-A00D-5302FDCF1A00}"/>
+              </a:ext>
+            </a:extLst>
+          </p:cNvPr>
+          <p:cNvPicPr>
+            <a:picLocks noChangeAspect="1"/>
+          </p:cNvPicPr>
+          <p:nvPr/>
+        </p:nvPicPr>
+        <p:blipFill>
+          <a:blip r:embed="rId3"/>
+          <a:stretch>
+            <a:fillRect/>
+          </a:stretch>
+        </p:blipFill>
+        <p:spPr>
+          <a:xfrm>
+            <a:off x="874676" y="218440"/>
+            <a:ext cx="6894572" cy="4527872"/>
+          </a:xfrm>
+          <a:prstGeom prst="rect">
+            <a:avLst/>
+          </a:prstGeom>
+        </p:spPr>
+      </p:pic>
+      <p:sp>
+        <p:nvSpPr>
+          <p:cNvPr id="5" name="Rectangle 4">
+            <a:extLst>
+              <a:ext uri="{FF2B5EF4-FFF2-40B4-BE49-F238E27FC236}">
+                <a16:creationId xmlns:a16="http://schemas.microsoft.com/office/drawing/2014/main" id="{41B1B28F-6CB7-4AFF-96B5-8F66FB20F53F}"/>
               </a:ext>
             </a:extLst>
           </p:cNvPr>
@@ -4441,8 +4634,8 @@
         </p:nvSpPr>
         <p:spPr>
           <a:xfrm>
-            <a:off x="4295523" y="3307771"/>
-            <a:ext cx="3379895" cy="2899065"/>
+            <a:off x="4202759" y="218440"/>
+            <a:ext cx="3566489" cy="1022350"/>
           </a:xfrm>
           <a:prstGeom prst="rect">
             <a:avLst/>
@@ -4481,10 +4674,10 @@
       </p:sp>
       <p:sp>
         <p:nvSpPr>
-          <p:cNvPr id="8" name="Rectangle 7">
-            <a:extLst>
-              <a:ext uri="{FF2B5EF4-FFF2-40B4-BE49-F238E27FC236}">
-                <a16:creationId xmlns:a16="http://schemas.microsoft.com/office/drawing/2014/main" id="{05AF9EDF-1D56-BC23-4AF3-995F1A2EDF11}"/>
+          <p:cNvPr id="7" name="Speech Bubble: Rectangle 6">
+            <a:extLst>
+              <a:ext uri="{FF2B5EF4-FFF2-40B4-BE49-F238E27FC236}">
+                <a16:creationId xmlns:a16="http://schemas.microsoft.com/office/drawing/2014/main" id="{EE701471-693E-4C55-A489-902B40991E7E}"/>
               </a:ext>
             </a:extLst>
           </p:cNvPr>
@@ -4493,24 +4686,80 @@
         </p:nvSpPr>
         <p:spPr>
           <a:xfrm>
-            <a:off x="4687614" y="4653694"/>
-            <a:ext cx="2151993" cy="134007"/>
+            <a:off x="228600" y="1102360"/>
+            <a:ext cx="5521960" cy="949960"/>
+          </a:xfrm>
+          <a:prstGeom prst="wedgeRectCallout">
+            <a:avLst>
+              <a:gd name="adj1" fmla="val 40809"/>
+              <a:gd name="adj2" fmla="val -94262"/>
+            </a:avLst>
+          </a:prstGeom>
+        </p:spPr>
+        <p:style>
+          <a:lnRef idx="2">
+            <a:schemeClr val="accent1"/>
+          </a:lnRef>
+          <a:fillRef idx="1">
+            <a:schemeClr val="lt1"/>
+          </a:fillRef>
+          <a:effectRef idx="0">
+            <a:schemeClr val="accent1"/>
+          </a:effectRef>
+          <a:fontRef idx="minor">
+            <a:schemeClr val="dk1"/>
+          </a:fontRef>
+        </p:style>
+        <p:txBody>
+          <a:bodyPr rtlCol="0" anchor="ctr"/>
+          <a:lstStyle/>
+          <a:p>
+            <a:pPr algn="ctr"/>
+            <a:r>
+              <a:rPr lang="en-US" sz="3200" dirty="0"/>
+              <a:t>Setup background image</a:t>
+            </a:r>
+          </a:p>
+        </p:txBody>
+      </p:sp>
+      <p:sp>
+        <p:nvSpPr>
+          <p:cNvPr id="17" name="Rectangle 16">
+            <a:extLst>
+              <a:ext uri="{FF2B5EF4-FFF2-40B4-BE49-F238E27FC236}">
+                <a16:creationId xmlns:a16="http://schemas.microsoft.com/office/drawing/2014/main" id="{7DE7BA4F-386A-4D81-8AB9-830AEEE64F91}"/>
+              </a:ext>
+            </a:extLst>
+          </p:cNvPr>
+          <p:cNvSpPr/>
+          <p:nvPr/>
+        </p:nvSpPr>
+        <p:spPr>
+          <a:xfrm>
+            <a:off x="9204961" y="3303235"/>
+            <a:ext cx="2432050" cy="537245"/>
           </a:xfrm>
           <a:prstGeom prst="rect">
             <a:avLst/>
           </a:prstGeom>
+          <a:noFill/>
+          <a:ln w="50800">
+            <a:solidFill>
+              <a:srgbClr val="FF0000"/>
+            </a:solidFill>
+          </a:ln>
         </p:spPr>
         <p:style>
           <a:lnRef idx="2">
-            <a:schemeClr val="dk1">
-              <a:shade val="15000"/>
+            <a:schemeClr val="accent1">
+              <a:shade val="50000"/>
             </a:schemeClr>
           </a:lnRef>
           <a:fillRef idx="1">
-            <a:schemeClr val="dk1"/>
+            <a:schemeClr val="accent1"/>
           </a:fillRef>
           <a:effectRef idx="0">
-            <a:schemeClr val="dk1"/>
+            <a:schemeClr val="accent1"/>
           </a:effectRef>
           <a:fontRef idx="minor">
             <a:schemeClr val="lt1"/>
@@ -4527,10 +4776,10 @@
       </p:sp>
       <p:sp>
         <p:nvSpPr>
-          <p:cNvPr id="10" name="Rectangle 9">
-            <a:extLst>
-              <a:ext uri="{FF2B5EF4-FFF2-40B4-BE49-F238E27FC236}">
-                <a16:creationId xmlns:a16="http://schemas.microsoft.com/office/drawing/2014/main" id="{A123CEA6-43F6-5255-DF6A-E6C9F646E0EF}"/>
+          <p:cNvPr id="21" name="Speech Bubble: Rectangle 20">
+            <a:extLst>
+              <a:ext uri="{FF2B5EF4-FFF2-40B4-BE49-F238E27FC236}">
+                <a16:creationId xmlns:a16="http://schemas.microsoft.com/office/drawing/2014/main" id="{4784EDEC-B45E-4732-AE8B-A69F8620BBA8}"/>
               </a:ext>
             </a:extLst>
           </p:cNvPr>
@@ -4539,27 +4788,28 @@
         </p:nvSpPr>
         <p:spPr>
           <a:xfrm>
-            <a:off x="4687613" y="5239046"/>
-            <a:ext cx="2151993" cy="134007"/>
-          </a:xfrm>
-          <a:prstGeom prst="rect">
-            <a:avLst/>
+            <a:off x="5604839" y="5062247"/>
+            <a:ext cx="5521960" cy="949960"/>
+          </a:xfrm>
+          <a:prstGeom prst="wedgeRectCallout">
+            <a:avLst>
+              <a:gd name="adj1" fmla="val 44857"/>
+              <a:gd name="adj2" fmla="val -172872"/>
+            </a:avLst>
           </a:prstGeom>
         </p:spPr>
         <p:style>
           <a:lnRef idx="2">
-            <a:schemeClr val="dk1">
-              <a:shade val="15000"/>
-            </a:schemeClr>
+            <a:schemeClr val="accent1"/>
           </a:lnRef>
           <a:fillRef idx="1">
-            <a:schemeClr val="dk1"/>
+            <a:schemeClr val="lt1"/>
           </a:fillRef>
           <a:effectRef idx="0">
-            <a:schemeClr val="dk1"/>
+            <a:schemeClr val="accent1"/>
           </a:effectRef>
           <a:fontRef idx="minor">
-            <a:schemeClr val="lt1"/>
+            <a:schemeClr val="dk1"/>
           </a:fontRef>
         </p:style>
         <p:txBody>
@@ -4567,60 +4817,24 @@
           <a:lstStyle/>
           <a:p>
             <a:pPr algn="ctr"/>
-            <a:endParaRPr lang="en-US"/>
-          </a:p>
-        </p:txBody>
-      </p:sp>
-      <p:sp>
-        <p:nvSpPr>
-          <p:cNvPr id="12" name="Rectangle 11">
-            <a:extLst>
-              <a:ext uri="{FF2B5EF4-FFF2-40B4-BE49-F238E27FC236}">
-                <a16:creationId xmlns:a16="http://schemas.microsoft.com/office/drawing/2014/main" id="{640C58B3-5677-F8F1-097F-0A5035F87DD9}"/>
-              </a:ext>
-            </a:extLst>
-          </p:cNvPr>
-          <p:cNvSpPr/>
-          <p:nvPr/>
-        </p:nvSpPr>
-        <p:spPr>
-          <a:xfrm>
-            <a:off x="4687613" y="4063441"/>
-            <a:ext cx="2151993" cy="134007"/>
-          </a:xfrm>
-          <a:prstGeom prst="rect">
-            <a:avLst/>
-          </a:prstGeom>
-        </p:spPr>
-        <p:style>
-          <a:lnRef idx="2">
-            <a:schemeClr val="dk1">
-              <a:shade val="15000"/>
-            </a:schemeClr>
-          </a:lnRef>
-          <a:fillRef idx="1">
-            <a:schemeClr val="dk1"/>
-          </a:fillRef>
-          <a:effectRef idx="0">
-            <a:schemeClr val="dk1"/>
-          </a:effectRef>
-          <a:fontRef idx="minor">
-            <a:schemeClr val="lt1"/>
-          </a:fontRef>
-        </p:style>
-        <p:txBody>
-          <a:bodyPr rtlCol="0" anchor="ctr"/>
-          <a:lstStyle/>
+            <a:r>
+              <a:rPr lang="en-US" sz="3200" dirty="0"/>
+              <a:t>Mask your username and </a:t>
+            </a:r>
+          </a:p>
           <a:p>
             <a:pPr algn="ctr"/>
-            <a:endParaRPr lang="en-US" dirty="0"/>
+            <a:r>
+              <a:rPr lang="en-US" sz="3200" dirty="0"/>
+              <a:t>Azure AD tenant name</a:t>
+            </a:r>
           </a:p>
         </p:txBody>
       </p:sp>
     </p:spTree>
     <p:extLst>
       <p:ext uri="{BB962C8B-B14F-4D97-AF65-F5344CB8AC3E}">
-        <p14:creationId xmlns:p14="http://schemas.microsoft.com/office/powerpoint/2010/main" val="4233353208"/>
+        <p14:creationId xmlns:p14="http://schemas.microsoft.com/office/powerpoint/2010/main" val="2453888186"/>
       </p:ext>
     </p:extLst>
   </p:cSld>
@@ -4652,7 +4866,7 @@
           <p:cNvPr id="5" name="Picture 4">
             <a:extLst>
               <a:ext uri="{FF2B5EF4-FFF2-40B4-BE49-F238E27FC236}">
-                <a16:creationId xmlns:a16="http://schemas.microsoft.com/office/drawing/2014/main" id="{68D03932-C0AC-D298-7E89-CE8BD615E5A3}"/>
+                <a16:creationId xmlns:a16="http://schemas.microsoft.com/office/drawing/2014/main" id="{AB1613B9-069B-DFB0-8D3E-0F52AA2D8DAB}"/>
               </a:ext>
             </a:extLst>
           </p:cNvPr>
@@ -4669,8 +4883,8 @@
         </p:blipFill>
         <p:spPr>
           <a:xfrm>
-            <a:off x="2614126" y="409153"/>
-            <a:ext cx="6963747" cy="6039693"/>
+            <a:off x="2276475" y="185737"/>
+            <a:ext cx="7639050" cy="6486525"/>
           </a:xfrm>
           <a:prstGeom prst="rect">
             <a:avLst/>
@@ -4679,10 +4893,10 @@
       </p:pic>
       <p:sp>
         <p:nvSpPr>
-          <p:cNvPr id="7" name="Rectangle 6">
-            <a:extLst>
-              <a:ext uri="{FF2B5EF4-FFF2-40B4-BE49-F238E27FC236}">
-                <a16:creationId xmlns:a16="http://schemas.microsoft.com/office/drawing/2014/main" id="{7D3CCFFC-C383-AA78-D695-4263D2DDAC2C}"/>
+          <p:cNvPr id="6" name="Rectangle 5">
+            <a:extLst>
+              <a:ext uri="{FF2B5EF4-FFF2-40B4-BE49-F238E27FC236}">
+                <a16:creationId xmlns:a16="http://schemas.microsoft.com/office/drawing/2014/main" id="{6B9733BF-CA1F-3F6F-6D33-4CAAC202B920}"/>
               </a:ext>
             </a:extLst>
           </p:cNvPr>
@@ -4691,514 +4905,8 @@
         </p:nvSpPr>
         <p:spPr>
           <a:xfrm>
-            <a:off x="6095999" y="1608999"/>
-            <a:ext cx="2151993" cy="134007"/>
-          </a:xfrm>
-          <a:prstGeom prst="rect">
-            <a:avLst/>
-          </a:prstGeom>
-        </p:spPr>
-        <p:style>
-          <a:lnRef idx="2">
-            <a:schemeClr val="accent2">
-              <a:shade val="15000"/>
-            </a:schemeClr>
-          </a:lnRef>
-          <a:fillRef idx="1">
-            <a:schemeClr val="accent2"/>
-          </a:fillRef>
-          <a:effectRef idx="0">
-            <a:schemeClr val="accent2"/>
-          </a:effectRef>
-          <a:fontRef idx="minor">
-            <a:schemeClr val="lt1"/>
-          </a:fontRef>
-        </p:style>
-        <p:txBody>
-          <a:bodyPr rtlCol="0" anchor="ctr"/>
-          <a:lstStyle/>
-          <a:p>
-            <a:pPr algn="ctr"/>
-            <a:endParaRPr lang="en-US" dirty="0"/>
-          </a:p>
-        </p:txBody>
-      </p:sp>
-      <p:sp>
-        <p:nvSpPr>
-          <p:cNvPr id="9" name="Rectangle 8">
-            <a:extLst>
-              <a:ext uri="{FF2B5EF4-FFF2-40B4-BE49-F238E27FC236}">
-                <a16:creationId xmlns:a16="http://schemas.microsoft.com/office/drawing/2014/main" id="{5195E67E-570B-6D26-B181-22FBEF3ED126}"/>
-              </a:ext>
-            </a:extLst>
-          </p:cNvPr>
-          <p:cNvSpPr/>
-          <p:nvPr/>
-        </p:nvSpPr>
-        <p:spPr>
-          <a:xfrm>
-            <a:off x="6801853" y="2322873"/>
-            <a:ext cx="1668380" cy="134007"/>
-          </a:xfrm>
-          <a:prstGeom prst="rect">
-            <a:avLst/>
-          </a:prstGeom>
-        </p:spPr>
-        <p:style>
-          <a:lnRef idx="2">
-            <a:schemeClr val="accent2">
-              <a:shade val="15000"/>
-            </a:schemeClr>
-          </a:lnRef>
-          <a:fillRef idx="1">
-            <a:schemeClr val="accent2"/>
-          </a:fillRef>
-          <a:effectRef idx="0">
-            <a:schemeClr val="accent2"/>
-          </a:effectRef>
-          <a:fontRef idx="minor">
-            <a:schemeClr val="lt1"/>
-          </a:fontRef>
-        </p:style>
-        <p:txBody>
-          <a:bodyPr rtlCol="0" anchor="ctr"/>
-          <a:lstStyle/>
-          <a:p>
-            <a:pPr algn="ctr"/>
-            <a:endParaRPr lang="en-US" dirty="0"/>
-          </a:p>
-        </p:txBody>
-      </p:sp>
-      <p:sp>
-        <p:nvSpPr>
-          <p:cNvPr id="11" name="Rectangle 10">
-            <a:extLst>
-              <a:ext uri="{FF2B5EF4-FFF2-40B4-BE49-F238E27FC236}">
-                <a16:creationId xmlns:a16="http://schemas.microsoft.com/office/drawing/2014/main" id="{22C4E748-44DD-1B6F-65C2-2A1224CD4370}"/>
-              </a:ext>
-            </a:extLst>
-          </p:cNvPr>
-          <p:cNvSpPr/>
-          <p:nvPr/>
-        </p:nvSpPr>
-        <p:spPr>
-          <a:xfrm>
-            <a:off x="6916498" y="2715904"/>
-            <a:ext cx="1668380" cy="134007"/>
-          </a:xfrm>
-          <a:prstGeom prst="rect">
-            <a:avLst/>
-          </a:prstGeom>
-        </p:spPr>
-        <p:style>
-          <a:lnRef idx="2">
-            <a:schemeClr val="accent2">
-              <a:shade val="15000"/>
-            </a:schemeClr>
-          </a:lnRef>
-          <a:fillRef idx="1">
-            <a:schemeClr val="accent2"/>
-          </a:fillRef>
-          <a:effectRef idx="0">
-            <a:schemeClr val="accent2"/>
-          </a:effectRef>
-          <a:fontRef idx="minor">
-            <a:schemeClr val="lt1"/>
-          </a:fontRef>
-        </p:style>
-        <p:txBody>
-          <a:bodyPr rtlCol="0" anchor="ctr"/>
-          <a:lstStyle/>
-          <a:p>
-            <a:pPr algn="ctr"/>
-            <a:endParaRPr lang="en-US" dirty="0"/>
-          </a:p>
-        </p:txBody>
-      </p:sp>
-      <p:sp>
-        <p:nvSpPr>
-          <p:cNvPr id="13" name="Rectangle 12">
-            <a:extLst>
-              <a:ext uri="{FF2B5EF4-FFF2-40B4-BE49-F238E27FC236}">
-                <a16:creationId xmlns:a16="http://schemas.microsoft.com/office/drawing/2014/main" id="{267413CA-CCA6-2DC0-6AF2-4F0A30FF814F}"/>
-              </a:ext>
-            </a:extLst>
-          </p:cNvPr>
-          <p:cNvSpPr/>
-          <p:nvPr/>
-        </p:nvSpPr>
-        <p:spPr>
-          <a:xfrm>
-            <a:off x="6801853" y="3103351"/>
-            <a:ext cx="1668380" cy="134007"/>
-          </a:xfrm>
-          <a:prstGeom prst="rect">
-            <a:avLst/>
-          </a:prstGeom>
-        </p:spPr>
-        <p:style>
-          <a:lnRef idx="2">
-            <a:schemeClr val="accent2">
-              <a:shade val="15000"/>
-            </a:schemeClr>
-          </a:lnRef>
-          <a:fillRef idx="1">
-            <a:schemeClr val="accent2"/>
-          </a:fillRef>
-          <a:effectRef idx="0">
-            <a:schemeClr val="accent2"/>
-          </a:effectRef>
-          <a:fontRef idx="minor">
-            <a:schemeClr val="lt1"/>
-          </a:fontRef>
-        </p:style>
-        <p:txBody>
-          <a:bodyPr rtlCol="0" anchor="ctr"/>
-          <a:lstStyle/>
-          <a:p>
-            <a:pPr algn="ctr"/>
-            <a:endParaRPr lang="en-US" dirty="0"/>
-          </a:p>
-        </p:txBody>
-      </p:sp>
-      <p:sp>
-        <p:nvSpPr>
-          <p:cNvPr id="15" name="Rectangle 14">
-            <a:extLst>
-              <a:ext uri="{FF2B5EF4-FFF2-40B4-BE49-F238E27FC236}">
-                <a16:creationId xmlns:a16="http://schemas.microsoft.com/office/drawing/2014/main" id="{FB536D0D-F6F1-A154-3AAE-3817243B76AA}"/>
-              </a:ext>
-            </a:extLst>
-          </p:cNvPr>
-          <p:cNvSpPr/>
-          <p:nvPr/>
-        </p:nvSpPr>
-        <p:spPr>
-          <a:xfrm>
-            <a:off x="6681537" y="3475470"/>
-            <a:ext cx="1668380" cy="134007"/>
-          </a:xfrm>
-          <a:prstGeom prst="rect">
-            <a:avLst/>
-          </a:prstGeom>
-        </p:spPr>
-        <p:style>
-          <a:lnRef idx="2">
-            <a:schemeClr val="accent2">
-              <a:shade val="15000"/>
-            </a:schemeClr>
-          </a:lnRef>
-          <a:fillRef idx="1">
-            <a:schemeClr val="accent2"/>
-          </a:fillRef>
-          <a:effectRef idx="0">
-            <a:schemeClr val="accent2"/>
-          </a:effectRef>
-          <a:fontRef idx="minor">
-            <a:schemeClr val="lt1"/>
-          </a:fontRef>
-        </p:style>
-        <p:txBody>
-          <a:bodyPr rtlCol="0" anchor="ctr"/>
-          <a:lstStyle/>
-          <a:p>
-            <a:pPr algn="ctr"/>
-            <a:endParaRPr lang="en-US" dirty="0"/>
-          </a:p>
-        </p:txBody>
-      </p:sp>
-      <p:sp>
-        <p:nvSpPr>
-          <p:cNvPr id="17" name="Rectangle 16">
-            <a:extLst>
-              <a:ext uri="{FF2B5EF4-FFF2-40B4-BE49-F238E27FC236}">
-                <a16:creationId xmlns:a16="http://schemas.microsoft.com/office/drawing/2014/main" id="{97F36EFD-B659-8A6C-2976-806CB84DAEB4}"/>
-              </a:ext>
-            </a:extLst>
-          </p:cNvPr>
-          <p:cNvSpPr/>
-          <p:nvPr/>
-        </p:nvSpPr>
-        <p:spPr>
-          <a:xfrm>
-            <a:off x="6681537" y="3894915"/>
-            <a:ext cx="1668380" cy="134007"/>
-          </a:xfrm>
-          <a:prstGeom prst="rect">
-            <a:avLst/>
-          </a:prstGeom>
-        </p:spPr>
-        <p:style>
-          <a:lnRef idx="2">
-            <a:schemeClr val="accent2">
-              <a:shade val="15000"/>
-            </a:schemeClr>
-          </a:lnRef>
-          <a:fillRef idx="1">
-            <a:schemeClr val="accent2"/>
-          </a:fillRef>
-          <a:effectRef idx="0">
-            <a:schemeClr val="accent2"/>
-          </a:effectRef>
-          <a:fontRef idx="minor">
-            <a:schemeClr val="lt1"/>
-          </a:fontRef>
-        </p:style>
-        <p:txBody>
-          <a:bodyPr rtlCol="0" anchor="ctr"/>
-          <a:lstStyle/>
-          <a:p>
-            <a:pPr algn="ctr"/>
-            <a:endParaRPr lang="en-US" dirty="0"/>
-          </a:p>
-        </p:txBody>
-      </p:sp>
-      <p:sp>
-        <p:nvSpPr>
-          <p:cNvPr id="19" name="Rectangle 18">
-            <a:extLst>
-              <a:ext uri="{FF2B5EF4-FFF2-40B4-BE49-F238E27FC236}">
-                <a16:creationId xmlns:a16="http://schemas.microsoft.com/office/drawing/2014/main" id="{15FCB042-481B-213F-91D6-C1C973CCACB2}"/>
-              </a:ext>
-            </a:extLst>
-          </p:cNvPr>
-          <p:cNvSpPr/>
-          <p:nvPr/>
-        </p:nvSpPr>
-        <p:spPr>
-          <a:xfrm>
-            <a:off x="6681537" y="4448368"/>
-            <a:ext cx="2654968" cy="134007"/>
-          </a:xfrm>
-          <a:prstGeom prst="rect">
-            <a:avLst/>
-          </a:prstGeom>
-        </p:spPr>
-        <p:style>
-          <a:lnRef idx="2">
-            <a:schemeClr val="accent2">
-              <a:shade val="15000"/>
-            </a:schemeClr>
-          </a:lnRef>
-          <a:fillRef idx="1">
-            <a:schemeClr val="accent2"/>
-          </a:fillRef>
-          <a:effectRef idx="0">
-            <a:schemeClr val="accent2"/>
-          </a:effectRef>
-          <a:fontRef idx="minor">
-            <a:schemeClr val="lt1"/>
-          </a:fontRef>
-        </p:style>
-        <p:txBody>
-          <a:bodyPr rtlCol="0" anchor="ctr"/>
-          <a:lstStyle/>
-          <a:p>
-            <a:pPr algn="ctr"/>
-            <a:endParaRPr lang="en-US" dirty="0"/>
-          </a:p>
-        </p:txBody>
-      </p:sp>
-      <p:sp>
-        <p:nvSpPr>
-          <p:cNvPr id="21" name="Rectangle 20">
-            <a:extLst>
-              <a:ext uri="{FF2B5EF4-FFF2-40B4-BE49-F238E27FC236}">
-                <a16:creationId xmlns:a16="http://schemas.microsoft.com/office/drawing/2014/main" id="{6FABFCEF-54E0-7BC5-EC10-3F9AD95AD44D}"/>
-              </a:ext>
-            </a:extLst>
-          </p:cNvPr>
-          <p:cNvSpPr/>
-          <p:nvPr/>
-        </p:nvSpPr>
-        <p:spPr>
-          <a:xfrm>
-            <a:off x="6681537" y="4835815"/>
-            <a:ext cx="2654968" cy="134007"/>
-          </a:xfrm>
-          <a:prstGeom prst="rect">
-            <a:avLst/>
-          </a:prstGeom>
-        </p:spPr>
-        <p:style>
-          <a:lnRef idx="2">
-            <a:schemeClr val="accent2">
-              <a:shade val="15000"/>
-            </a:schemeClr>
-          </a:lnRef>
-          <a:fillRef idx="1">
-            <a:schemeClr val="accent2"/>
-          </a:fillRef>
-          <a:effectRef idx="0">
-            <a:schemeClr val="accent2"/>
-          </a:effectRef>
-          <a:fontRef idx="minor">
-            <a:schemeClr val="lt1"/>
-          </a:fontRef>
-        </p:style>
-        <p:txBody>
-          <a:bodyPr rtlCol="0" anchor="ctr"/>
-          <a:lstStyle/>
-          <a:p>
-            <a:pPr algn="ctr"/>
-            <a:endParaRPr lang="en-US" dirty="0"/>
-          </a:p>
-        </p:txBody>
-      </p:sp>
-      <p:sp>
-        <p:nvSpPr>
-          <p:cNvPr id="23" name="Rectangle 22">
-            <a:extLst>
-              <a:ext uri="{FF2B5EF4-FFF2-40B4-BE49-F238E27FC236}">
-                <a16:creationId xmlns:a16="http://schemas.microsoft.com/office/drawing/2014/main" id="{9936A0C8-36D6-4A6F-9427-D8D5C5F2E849}"/>
-              </a:ext>
-            </a:extLst>
-          </p:cNvPr>
-          <p:cNvSpPr/>
-          <p:nvPr/>
-        </p:nvSpPr>
-        <p:spPr>
-          <a:xfrm>
-            <a:off x="6681537" y="5249001"/>
-            <a:ext cx="2654968" cy="134007"/>
-          </a:xfrm>
-          <a:prstGeom prst="rect">
-            <a:avLst/>
-          </a:prstGeom>
-        </p:spPr>
-        <p:style>
-          <a:lnRef idx="2">
-            <a:schemeClr val="accent2">
-              <a:shade val="15000"/>
-            </a:schemeClr>
-          </a:lnRef>
-          <a:fillRef idx="1">
-            <a:schemeClr val="accent2"/>
-          </a:fillRef>
-          <a:effectRef idx="0">
-            <a:schemeClr val="accent2"/>
-          </a:effectRef>
-          <a:fontRef idx="minor">
-            <a:schemeClr val="lt1"/>
-          </a:fontRef>
-        </p:style>
-        <p:txBody>
-          <a:bodyPr rtlCol="0" anchor="ctr"/>
-          <a:lstStyle/>
-          <a:p>
-            <a:pPr algn="ctr"/>
-            <a:endParaRPr lang="en-US" dirty="0"/>
-          </a:p>
-        </p:txBody>
-      </p:sp>
-      <p:sp>
-        <p:nvSpPr>
-          <p:cNvPr id="25" name="Rectangle 24">
-            <a:extLst>
-              <a:ext uri="{FF2B5EF4-FFF2-40B4-BE49-F238E27FC236}">
-                <a16:creationId xmlns:a16="http://schemas.microsoft.com/office/drawing/2014/main" id="{AA82D259-7054-45FC-68BA-0C797E5D331C}"/>
-              </a:ext>
-            </a:extLst>
-          </p:cNvPr>
-          <p:cNvSpPr/>
-          <p:nvPr/>
-        </p:nvSpPr>
-        <p:spPr>
-          <a:xfrm>
-            <a:off x="7395411" y="5595183"/>
-            <a:ext cx="1443789" cy="134007"/>
-          </a:xfrm>
-          <a:prstGeom prst="rect">
-            <a:avLst/>
-          </a:prstGeom>
-        </p:spPr>
-        <p:style>
-          <a:lnRef idx="2">
-            <a:schemeClr val="accent2">
-              <a:shade val="15000"/>
-            </a:schemeClr>
-          </a:lnRef>
-          <a:fillRef idx="1">
-            <a:schemeClr val="accent2"/>
-          </a:fillRef>
-          <a:effectRef idx="0">
-            <a:schemeClr val="accent2"/>
-          </a:effectRef>
-          <a:fontRef idx="minor">
-            <a:schemeClr val="lt1"/>
-          </a:fontRef>
-        </p:style>
-        <p:txBody>
-          <a:bodyPr rtlCol="0" anchor="ctr"/>
-          <a:lstStyle/>
-          <a:p>
-            <a:pPr algn="ctr"/>
-            <a:endParaRPr lang="en-US" dirty="0"/>
-          </a:p>
-        </p:txBody>
-      </p:sp>
-      <p:sp>
-        <p:nvSpPr>
-          <p:cNvPr id="27" name="Rectangle 26">
-            <a:extLst>
-              <a:ext uri="{FF2B5EF4-FFF2-40B4-BE49-F238E27FC236}">
-                <a16:creationId xmlns:a16="http://schemas.microsoft.com/office/drawing/2014/main" id="{4CC2FCFD-CD85-ABFA-C2B8-F0F23F35D20E}"/>
-              </a:ext>
-            </a:extLst>
-          </p:cNvPr>
-          <p:cNvSpPr/>
-          <p:nvPr/>
-        </p:nvSpPr>
-        <p:spPr>
-          <a:xfrm>
-            <a:off x="6565232" y="5807358"/>
-            <a:ext cx="2019646" cy="134007"/>
-          </a:xfrm>
-          <a:prstGeom prst="rect">
-            <a:avLst/>
-          </a:prstGeom>
-        </p:spPr>
-        <p:style>
-          <a:lnRef idx="2">
-            <a:schemeClr val="accent2">
-              <a:shade val="15000"/>
-            </a:schemeClr>
-          </a:lnRef>
-          <a:fillRef idx="1">
-            <a:schemeClr val="accent2"/>
-          </a:fillRef>
-          <a:effectRef idx="0">
-            <a:schemeClr val="accent2"/>
-          </a:effectRef>
-          <a:fontRef idx="minor">
-            <a:schemeClr val="lt1"/>
-          </a:fontRef>
-        </p:style>
-        <p:txBody>
-          <a:bodyPr rtlCol="0" anchor="ctr"/>
-          <a:lstStyle/>
-          <a:p>
-            <a:pPr algn="ctr"/>
-            <a:endParaRPr lang="en-US" dirty="0"/>
-          </a:p>
-        </p:txBody>
-      </p:sp>
-      <p:sp>
-        <p:nvSpPr>
-          <p:cNvPr id="3" name="Rectangle 2">
-            <a:extLst>
-              <a:ext uri="{FF2B5EF4-FFF2-40B4-BE49-F238E27FC236}">
-                <a16:creationId xmlns:a16="http://schemas.microsoft.com/office/drawing/2014/main" id="{35CFF9F7-2D94-82D6-3082-74B5548A83BC}"/>
-              </a:ext>
-            </a:extLst>
-          </p:cNvPr>
-          <p:cNvSpPr/>
-          <p:nvPr/>
-        </p:nvSpPr>
-        <p:spPr>
-          <a:xfrm>
-            <a:off x="5495636" y="948402"/>
-            <a:ext cx="4068876" cy="5378507"/>
+            <a:off x="7615327" y="51179"/>
+            <a:ext cx="886889" cy="914337"/>
           </a:xfrm>
           <a:prstGeom prst="rect">
             <a:avLst/>
@@ -5235,10 +4943,62 @@
           </a:p>
         </p:txBody>
       </p:sp>
+      <p:sp>
+        <p:nvSpPr>
+          <p:cNvPr id="7" name="Rectangle 6">
+            <a:extLst>
+              <a:ext uri="{FF2B5EF4-FFF2-40B4-BE49-F238E27FC236}">
+                <a16:creationId xmlns:a16="http://schemas.microsoft.com/office/drawing/2014/main" id="{259BC57D-EE86-1E1D-6703-FCDD09159298}"/>
+              </a:ext>
+            </a:extLst>
+          </p:cNvPr>
+          <p:cNvSpPr/>
+          <p:nvPr/>
+        </p:nvSpPr>
+        <p:spPr>
+          <a:xfrm>
+            <a:off x="2276475" y="4258744"/>
+            <a:ext cx="5998561" cy="914337"/>
+          </a:xfrm>
+          <a:prstGeom prst="rect">
+            <a:avLst/>
+          </a:prstGeom>
+          <a:noFill/>
+          <a:ln w="50800">
+            <a:solidFill>
+              <a:srgbClr val="FF0000"/>
+            </a:solidFill>
+          </a:ln>
+        </p:spPr>
+        <p:style>
+          <a:lnRef idx="2">
+            <a:schemeClr val="accent1">
+              <a:shade val="50000"/>
+            </a:schemeClr>
+          </a:lnRef>
+          <a:fillRef idx="1">
+            <a:schemeClr val="accent1"/>
+          </a:fillRef>
+          <a:effectRef idx="0">
+            <a:schemeClr val="accent1"/>
+          </a:effectRef>
+          <a:fontRef idx="minor">
+            <a:schemeClr val="lt1"/>
+          </a:fontRef>
+        </p:style>
+        <p:txBody>
+          <a:bodyPr rtlCol="0" anchor="ctr"/>
+          <a:lstStyle/>
+          <a:p>
+            <a:pPr algn="ctr"/>
+            <a:endParaRPr lang="en-US"/>
+          </a:p>
+        </p:txBody>
+      </p:sp>
     </p:spTree>
     <p:extLst>
       <p:ext uri="{BB962C8B-B14F-4D97-AF65-F5344CB8AC3E}">
-        <p14:creationId xmlns:p14="http://schemas.microsoft.com/office/powerpoint/2010/main" val="1764195459"/>
+        <p14:creationId xmlns:p14="http://schemas.microsoft.com/office/powerpoint/2010/main" val="3555942452"/>
       </p:ext>
     </p:extLst>
   </p:cSld>
@@ -5267,10 +5027,10 @@
       </p:grpSpPr>
       <p:pic>
         <p:nvPicPr>
-          <p:cNvPr id="5" name="Picture 4">
-            <a:extLst>
-              <a:ext uri="{FF2B5EF4-FFF2-40B4-BE49-F238E27FC236}">
-                <a16:creationId xmlns:a16="http://schemas.microsoft.com/office/drawing/2014/main" id="{A8A65ECA-FC08-7DD1-42A4-B24B60D7F337}"/>
+          <p:cNvPr id="3" name="Picture 2">
+            <a:extLst>
+              <a:ext uri="{FF2B5EF4-FFF2-40B4-BE49-F238E27FC236}">
+                <a16:creationId xmlns:a16="http://schemas.microsoft.com/office/drawing/2014/main" id="{4386F712-283E-CDC2-FF63-BE9347234A31}"/>
               </a:ext>
             </a:extLst>
           </p:cNvPr>
@@ -5287,8 +5047,8 @@
         </p:blipFill>
         <p:spPr>
           <a:xfrm>
-            <a:off x="1274325" y="0"/>
-            <a:ext cx="9643350" cy="6858000"/>
+            <a:off x="4295523" y="580627"/>
+            <a:ext cx="3600953" cy="5696745"/>
           </a:xfrm>
           <a:prstGeom prst="rect">
             <a:avLst/>
@@ -5297,10 +5057,10 @@
       </p:pic>
       <p:sp>
         <p:nvSpPr>
-          <p:cNvPr id="6" name="Rectangle 5">
-            <a:extLst>
-              <a:ext uri="{FF2B5EF4-FFF2-40B4-BE49-F238E27FC236}">
-                <a16:creationId xmlns:a16="http://schemas.microsoft.com/office/drawing/2014/main" id="{E17D5DDC-8135-B562-2C52-9C1DF203AFFC}"/>
+          <p:cNvPr id="7" name="Rectangle 6">
+            <a:extLst>
+              <a:ext uri="{FF2B5EF4-FFF2-40B4-BE49-F238E27FC236}">
+                <a16:creationId xmlns:a16="http://schemas.microsoft.com/office/drawing/2014/main" id="{7B0DC751-7AA6-9733-67FD-907CA822C892}"/>
               </a:ext>
             </a:extLst>
           </p:cNvPr>
@@ -5309,8 +5069,8 @@
         </p:nvSpPr>
         <p:spPr>
           <a:xfrm>
-            <a:off x="1339357" y="3429000"/>
-            <a:ext cx="9428981" cy="944217"/>
+            <a:off x="4295523" y="3307771"/>
+            <a:ext cx="3379895" cy="2899065"/>
           </a:xfrm>
           <a:prstGeom prst="rect">
             <a:avLst/>
@@ -5347,10 +5107,766 @@
           </a:p>
         </p:txBody>
       </p:sp>
+      <p:sp>
+        <p:nvSpPr>
+          <p:cNvPr id="8" name="Rectangle 7">
+            <a:extLst>
+              <a:ext uri="{FF2B5EF4-FFF2-40B4-BE49-F238E27FC236}">
+                <a16:creationId xmlns:a16="http://schemas.microsoft.com/office/drawing/2014/main" id="{05AF9EDF-1D56-BC23-4AF3-995F1A2EDF11}"/>
+              </a:ext>
+            </a:extLst>
+          </p:cNvPr>
+          <p:cNvSpPr/>
+          <p:nvPr/>
+        </p:nvSpPr>
+        <p:spPr>
+          <a:xfrm>
+            <a:off x="4687614" y="4653694"/>
+            <a:ext cx="2151993" cy="134007"/>
+          </a:xfrm>
+          <a:prstGeom prst="rect">
+            <a:avLst/>
+          </a:prstGeom>
+        </p:spPr>
+        <p:style>
+          <a:lnRef idx="2">
+            <a:schemeClr val="dk1">
+              <a:shade val="15000"/>
+            </a:schemeClr>
+          </a:lnRef>
+          <a:fillRef idx="1">
+            <a:schemeClr val="dk1"/>
+          </a:fillRef>
+          <a:effectRef idx="0">
+            <a:schemeClr val="dk1"/>
+          </a:effectRef>
+          <a:fontRef idx="minor">
+            <a:schemeClr val="lt1"/>
+          </a:fontRef>
+        </p:style>
+        <p:txBody>
+          <a:bodyPr rtlCol="0" anchor="ctr"/>
+          <a:lstStyle/>
+          <a:p>
+            <a:pPr algn="ctr"/>
+            <a:endParaRPr lang="en-US"/>
+          </a:p>
+        </p:txBody>
+      </p:sp>
+      <p:sp>
+        <p:nvSpPr>
+          <p:cNvPr id="10" name="Rectangle 9">
+            <a:extLst>
+              <a:ext uri="{FF2B5EF4-FFF2-40B4-BE49-F238E27FC236}">
+                <a16:creationId xmlns:a16="http://schemas.microsoft.com/office/drawing/2014/main" id="{A123CEA6-43F6-5255-DF6A-E6C9F646E0EF}"/>
+              </a:ext>
+            </a:extLst>
+          </p:cNvPr>
+          <p:cNvSpPr/>
+          <p:nvPr/>
+        </p:nvSpPr>
+        <p:spPr>
+          <a:xfrm>
+            <a:off x="4687613" y="5239046"/>
+            <a:ext cx="2151993" cy="134007"/>
+          </a:xfrm>
+          <a:prstGeom prst="rect">
+            <a:avLst/>
+          </a:prstGeom>
+        </p:spPr>
+        <p:style>
+          <a:lnRef idx="2">
+            <a:schemeClr val="dk1">
+              <a:shade val="15000"/>
+            </a:schemeClr>
+          </a:lnRef>
+          <a:fillRef idx="1">
+            <a:schemeClr val="dk1"/>
+          </a:fillRef>
+          <a:effectRef idx="0">
+            <a:schemeClr val="dk1"/>
+          </a:effectRef>
+          <a:fontRef idx="minor">
+            <a:schemeClr val="lt1"/>
+          </a:fontRef>
+        </p:style>
+        <p:txBody>
+          <a:bodyPr rtlCol="0" anchor="ctr"/>
+          <a:lstStyle/>
+          <a:p>
+            <a:pPr algn="ctr"/>
+            <a:endParaRPr lang="en-US"/>
+          </a:p>
+        </p:txBody>
+      </p:sp>
+      <p:sp>
+        <p:nvSpPr>
+          <p:cNvPr id="12" name="Rectangle 11">
+            <a:extLst>
+              <a:ext uri="{FF2B5EF4-FFF2-40B4-BE49-F238E27FC236}">
+                <a16:creationId xmlns:a16="http://schemas.microsoft.com/office/drawing/2014/main" id="{640C58B3-5677-F8F1-097F-0A5035F87DD9}"/>
+              </a:ext>
+            </a:extLst>
+          </p:cNvPr>
+          <p:cNvSpPr/>
+          <p:nvPr/>
+        </p:nvSpPr>
+        <p:spPr>
+          <a:xfrm>
+            <a:off x="4687613" y="4063441"/>
+            <a:ext cx="2151993" cy="134007"/>
+          </a:xfrm>
+          <a:prstGeom prst="rect">
+            <a:avLst/>
+          </a:prstGeom>
+        </p:spPr>
+        <p:style>
+          <a:lnRef idx="2">
+            <a:schemeClr val="dk1">
+              <a:shade val="15000"/>
+            </a:schemeClr>
+          </a:lnRef>
+          <a:fillRef idx="1">
+            <a:schemeClr val="dk1"/>
+          </a:fillRef>
+          <a:effectRef idx="0">
+            <a:schemeClr val="dk1"/>
+          </a:effectRef>
+          <a:fontRef idx="minor">
+            <a:schemeClr val="lt1"/>
+          </a:fontRef>
+        </p:style>
+        <p:txBody>
+          <a:bodyPr rtlCol="0" anchor="ctr"/>
+          <a:lstStyle/>
+          <a:p>
+            <a:pPr algn="ctr"/>
+            <a:endParaRPr lang="en-US" dirty="0"/>
+          </a:p>
+        </p:txBody>
+      </p:sp>
     </p:spTree>
     <p:extLst>
       <p:ext uri="{BB962C8B-B14F-4D97-AF65-F5344CB8AC3E}">
-        <p14:creationId xmlns:p14="http://schemas.microsoft.com/office/powerpoint/2010/main" val="1053115456"/>
+        <p14:creationId xmlns:p14="http://schemas.microsoft.com/office/powerpoint/2010/main" val="4233353208"/>
+      </p:ext>
+    </p:extLst>
+  </p:cSld>
+  <p:clrMapOvr>
+    <a:masterClrMapping/>
+  </p:clrMapOvr>
+</p:sld>
+</file>
+
+<file path=ppt/slides/slide9.xml><?xml version="1.0" encoding="utf-8"?>
+<p:sld xmlns:a="http://schemas.openxmlformats.org/drawingml/2006/main" xmlns:r="http://schemas.openxmlformats.org/officeDocument/2006/relationships" xmlns:p="http://schemas.openxmlformats.org/presentationml/2006/main">
+  <p:cSld>
+    <p:spTree>
+      <p:nvGrpSpPr>
+        <p:cNvPr id="1" name=""/>
+        <p:cNvGrpSpPr/>
+        <p:nvPr/>
+      </p:nvGrpSpPr>
+      <p:grpSpPr>
+        <a:xfrm>
+          <a:off x="0" y="0"/>
+          <a:ext cx="0" cy="0"/>
+          <a:chOff x="0" y="0"/>
+          <a:chExt cx="0" cy="0"/>
+        </a:xfrm>
+      </p:grpSpPr>
+      <p:pic>
+        <p:nvPicPr>
+          <p:cNvPr id="5" name="Picture 4">
+            <a:extLst>
+              <a:ext uri="{FF2B5EF4-FFF2-40B4-BE49-F238E27FC236}">
+                <a16:creationId xmlns:a16="http://schemas.microsoft.com/office/drawing/2014/main" id="{68D03932-C0AC-D298-7E89-CE8BD615E5A3}"/>
+              </a:ext>
+            </a:extLst>
+          </p:cNvPr>
+          <p:cNvPicPr>
+            <a:picLocks noChangeAspect="1"/>
+          </p:cNvPicPr>
+          <p:nvPr/>
+        </p:nvPicPr>
+        <p:blipFill>
+          <a:blip r:embed="rId2"/>
+          <a:stretch>
+            <a:fillRect/>
+          </a:stretch>
+        </p:blipFill>
+        <p:spPr>
+          <a:xfrm>
+            <a:off x="2614126" y="409153"/>
+            <a:ext cx="6963747" cy="6039693"/>
+          </a:xfrm>
+          <a:prstGeom prst="rect">
+            <a:avLst/>
+          </a:prstGeom>
+        </p:spPr>
+      </p:pic>
+      <p:sp>
+        <p:nvSpPr>
+          <p:cNvPr id="7" name="Rectangle 6">
+            <a:extLst>
+              <a:ext uri="{FF2B5EF4-FFF2-40B4-BE49-F238E27FC236}">
+                <a16:creationId xmlns:a16="http://schemas.microsoft.com/office/drawing/2014/main" id="{7D3CCFFC-C383-AA78-D695-4263D2DDAC2C}"/>
+              </a:ext>
+            </a:extLst>
+          </p:cNvPr>
+          <p:cNvSpPr/>
+          <p:nvPr/>
+        </p:nvSpPr>
+        <p:spPr>
+          <a:xfrm>
+            <a:off x="6095999" y="1608999"/>
+            <a:ext cx="2151993" cy="134007"/>
+          </a:xfrm>
+          <a:prstGeom prst="rect">
+            <a:avLst/>
+          </a:prstGeom>
+        </p:spPr>
+        <p:style>
+          <a:lnRef idx="2">
+            <a:schemeClr val="accent2">
+              <a:shade val="15000"/>
+            </a:schemeClr>
+          </a:lnRef>
+          <a:fillRef idx="1">
+            <a:schemeClr val="accent2"/>
+          </a:fillRef>
+          <a:effectRef idx="0">
+            <a:schemeClr val="accent2"/>
+          </a:effectRef>
+          <a:fontRef idx="minor">
+            <a:schemeClr val="lt1"/>
+          </a:fontRef>
+        </p:style>
+        <p:txBody>
+          <a:bodyPr rtlCol="0" anchor="ctr"/>
+          <a:lstStyle/>
+          <a:p>
+            <a:pPr algn="ctr"/>
+            <a:endParaRPr lang="en-US" dirty="0"/>
+          </a:p>
+        </p:txBody>
+      </p:sp>
+      <p:sp>
+        <p:nvSpPr>
+          <p:cNvPr id="9" name="Rectangle 8">
+            <a:extLst>
+              <a:ext uri="{FF2B5EF4-FFF2-40B4-BE49-F238E27FC236}">
+                <a16:creationId xmlns:a16="http://schemas.microsoft.com/office/drawing/2014/main" id="{5195E67E-570B-6D26-B181-22FBEF3ED126}"/>
+              </a:ext>
+            </a:extLst>
+          </p:cNvPr>
+          <p:cNvSpPr/>
+          <p:nvPr/>
+        </p:nvSpPr>
+        <p:spPr>
+          <a:xfrm>
+            <a:off x="6801853" y="2322873"/>
+            <a:ext cx="1668380" cy="134007"/>
+          </a:xfrm>
+          <a:prstGeom prst="rect">
+            <a:avLst/>
+          </a:prstGeom>
+        </p:spPr>
+        <p:style>
+          <a:lnRef idx="2">
+            <a:schemeClr val="accent2">
+              <a:shade val="15000"/>
+            </a:schemeClr>
+          </a:lnRef>
+          <a:fillRef idx="1">
+            <a:schemeClr val="accent2"/>
+          </a:fillRef>
+          <a:effectRef idx="0">
+            <a:schemeClr val="accent2"/>
+          </a:effectRef>
+          <a:fontRef idx="minor">
+            <a:schemeClr val="lt1"/>
+          </a:fontRef>
+        </p:style>
+        <p:txBody>
+          <a:bodyPr rtlCol="0" anchor="ctr"/>
+          <a:lstStyle/>
+          <a:p>
+            <a:pPr algn="ctr"/>
+            <a:endParaRPr lang="en-US" dirty="0"/>
+          </a:p>
+        </p:txBody>
+      </p:sp>
+      <p:sp>
+        <p:nvSpPr>
+          <p:cNvPr id="11" name="Rectangle 10">
+            <a:extLst>
+              <a:ext uri="{FF2B5EF4-FFF2-40B4-BE49-F238E27FC236}">
+                <a16:creationId xmlns:a16="http://schemas.microsoft.com/office/drawing/2014/main" id="{22C4E748-44DD-1B6F-65C2-2A1224CD4370}"/>
+              </a:ext>
+            </a:extLst>
+          </p:cNvPr>
+          <p:cNvSpPr/>
+          <p:nvPr/>
+        </p:nvSpPr>
+        <p:spPr>
+          <a:xfrm>
+            <a:off x="6916498" y="2715904"/>
+            <a:ext cx="1668380" cy="134007"/>
+          </a:xfrm>
+          <a:prstGeom prst="rect">
+            <a:avLst/>
+          </a:prstGeom>
+        </p:spPr>
+        <p:style>
+          <a:lnRef idx="2">
+            <a:schemeClr val="accent2">
+              <a:shade val="15000"/>
+            </a:schemeClr>
+          </a:lnRef>
+          <a:fillRef idx="1">
+            <a:schemeClr val="accent2"/>
+          </a:fillRef>
+          <a:effectRef idx="0">
+            <a:schemeClr val="accent2"/>
+          </a:effectRef>
+          <a:fontRef idx="minor">
+            <a:schemeClr val="lt1"/>
+          </a:fontRef>
+        </p:style>
+        <p:txBody>
+          <a:bodyPr rtlCol="0" anchor="ctr"/>
+          <a:lstStyle/>
+          <a:p>
+            <a:pPr algn="ctr"/>
+            <a:endParaRPr lang="en-US" dirty="0"/>
+          </a:p>
+        </p:txBody>
+      </p:sp>
+      <p:sp>
+        <p:nvSpPr>
+          <p:cNvPr id="13" name="Rectangle 12">
+            <a:extLst>
+              <a:ext uri="{FF2B5EF4-FFF2-40B4-BE49-F238E27FC236}">
+                <a16:creationId xmlns:a16="http://schemas.microsoft.com/office/drawing/2014/main" id="{267413CA-CCA6-2DC0-6AF2-4F0A30FF814F}"/>
+              </a:ext>
+            </a:extLst>
+          </p:cNvPr>
+          <p:cNvSpPr/>
+          <p:nvPr/>
+        </p:nvSpPr>
+        <p:spPr>
+          <a:xfrm>
+            <a:off x="6801853" y="3103351"/>
+            <a:ext cx="1668380" cy="134007"/>
+          </a:xfrm>
+          <a:prstGeom prst="rect">
+            <a:avLst/>
+          </a:prstGeom>
+        </p:spPr>
+        <p:style>
+          <a:lnRef idx="2">
+            <a:schemeClr val="accent2">
+              <a:shade val="15000"/>
+            </a:schemeClr>
+          </a:lnRef>
+          <a:fillRef idx="1">
+            <a:schemeClr val="accent2"/>
+          </a:fillRef>
+          <a:effectRef idx="0">
+            <a:schemeClr val="accent2"/>
+          </a:effectRef>
+          <a:fontRef idx="minor">
+            <a:schemeClr val="lt1"/>
+          </a:fontRef>
+        </p:style>
+        <p:txBody>
+          <a:bodyPr rtlCol="0" anchor="ctr"/>
+          <a:lstStyle/>
+          <a:p>
+            <a:pPr algn="ctr"/>
+            <a:endParaRPr lang="en-US" dirty="0"/>
+          </a:p>
+        </p:txBody>
+      </p:sp>
+      <p:sp>
+        <p:nvSpPr>
+          <p:cNvPr id="15" name="Rectangle 14">
+            <a:extLst>
+              <a:ext uri="{FF2B5EF4-FFF2-40B4-BE49-F238E27FC236}">
+                <a16:creationId xmlns:a16="http://schemas.microsoft.com/office/drawing/2014/main" id="{FB536D0D-F6F1-A154-3AAE-3817243B76AA}"/>
+              </a:ext>
+            </a:extLst>
+          </p:cNvPr>
+          <p:cNvSpPr/>
+          <p:nvPr/>
+        </p:nvSpPr>
+        <p:spPr>
+          <a:xfrm>
+            <a:off x="6681537" y="3475470"/>
+            <a:ext cx="1668380" cy="134007"/>
+          </a:xfrm>
+          <a:prstGeom prst="rect">
+            <a:avLst/>
+          </a:prstGeom>
+        </p:spPr>
+        <p:style>
+          <a:lnRef idx="2">
+            <a:schemeClr val="accent2">
+              <a:shade val="15000"/>
+            </a:schemeClr>
+          </a:lnRef>
+          <a:fillRef idx="1">
+            <a:schemeClr val="accent2"/>
+          </a:fillRef>
+          <a:effectRef idx="0">
+            <a:schemeClr val="accent2"/>
+          </a:effectRef>
+          <a:fontRef idx="minor">
+            <a:schemeClr val="lt1"/>
+          </a:fontRef>
+        </p:style>
+        <p:txBody>
+          <a:bodyPr rtlCol="0" anchor="ctr"/>
+          <a:lstStyle/>
+          <a:p>
+            <a:pPr algn="ctr"/>
+            <a:endParaRPr lang="en-US" dirty="0"/>
+          </a:p>
+        </p:txBody>
+      </p:sp>
+      <p:sp>
+        <p:nvSpPr>
+          <p:cNvPr id="17" name="Rectangle 16">
+            <a:extLst>
+              <a:ext uri="{FF2B5EF4-FFF2-40B4-BE49-F238E27FC236}">
+                <a16:creationId xmlns:a16="http://schemas.microsoft.com/office/drawing/2014/main" id="{97F36EFD-B659-8A6C-2976-806CB84DAEB4}"/>
+              </a:ext>
+            </a:extLst>
+          </p:cNvPr>
+          <p:cNvSpPr/>
+          <p:nvPr/>
+        </p:nvSpPr>
+        <p:spPr>
+          <a:xfrm>
+            <a:off x="6681537" y="3894915"/>
+            <a:ext cx="1668380" cy="134007"/>
+          </a:xfrm>
+          <a:prstGeom prst="rect">
+            <a:avLst/>
+          </a:prstGeom>
+        </p:spPr>
+        <p:style>
+          <a:lnRef idx="2">
+            <a:schemeClr val="accent2">
+              <a:shade val="15000"/>
+            </a:schemeClr>
+          </a:lnRef>
+          <a:fillRef idx="1">
+            <a:schemeClr val="accent2"/>
+          </a:fillRef>
+          <a:effectRef idx="0">
+            <a:schemeClr val="accent2"/>
+          </a:effectRef>
+          <a:fontRef idx="minor">
+            <a:schemeClr val="lt1"/>
+          </a:fontRef>
+        </p:style>
+        <p:txBody>
+          <a:bodyPr rtlCol="0" anchor="ctr"/>
+          <a:lstStyle/>
+          <a:p>
+            <a:pPr algn="ctr"/>
+            <a:endParaRPr lang="en-US" dirty="0"/>
+          </a:p>
+        </p:txBody>
+      </p:sp>
+      <p:sp>
+        <p:nvSpPr>
+          <p:cNvPr id="19" name="Rectangle 18">
+            <a:extLst>
+              <a:ext uri="{FF2B5EF4-FFF2-40B4-BE49-F238E27FC236}">
+                <a16:creationId xmlns:a16="http://schemas.microsoft.com/office/drawing/2014/main" id="{15FCB042-481B-213F-91D6-C1C973CCACB2}"/>
+              </a:ext>
+            </a:extLst>
+          </p:cNvPr>
+          <p:cNvSpPr/>
+          <p:nvPr/>
+        </p:nvSpPr>
+        <p:spPr>
+          <a:xfrm>
+            <a:off x="6681537" y="4448368"/>
+            <a:ext cx="2654968" cy="134007"/>
+          </a:xfrm>
+          <a:prstGeom prst="rect">
+            <a:avLst/>
+          </a:prstGeom>
+        </p:spPr>
+        <p:style>
+          <a:lnRef idx="2">
+            <a:schemeClr val="accent2">
+              <a:shade val="15000"/>
+            </a:schemeClr>
+          </a:lnRef>
+          <a:fillRef idx="1">
+            <a:schemeClr val="accent2"/>
+          </a:fillRef>
+          <a:effectRef idx="0">
+            <a:schemeClr val="accent2"/>
+          </a:effectRef>
+          <a:fontRef idx="minor">
+            <a:schemeClr val="lt1"/>
+          </a:fontRef>
+        </p:style>
+        <p:txBody>
+          <a:bodyPr rtlCol="0" anchor="ctr"/>
+          <a:lstStyle/>
+          <a:p>
+            <a:pPr algn="ctr"/>
+            <a:endParaRPr lang="en-US" dirty="0"/>
+          </a:p>
+        </p:txBody>
+      </p:sp>
+      <p:sp>
+        <p:nvSpPr>
+          <p:cNvPr id="21" name="Rectangle 20">
+            <a:extLst>
+              <a:ext uri="{FF2B5EF4-FFF2-40B4-BE49-F238E27FC236}">
+                <a16:creationId xmlns:a16="http://schemas.microsoft.com/office/drawing/2014/main" id="{6FABFCEF-54E0-7BC5-EC10-3F9AD95AD44D}"/>
+              </a:ext>
+            </a:extLst>
+          </p:cNvPr>
+          <p:cNvSpPr/>
+          <p:nvPr/>
+        </p:nvSpPr>
+        <p:spPr>
+          <a:xfrm>
+            <a:off x="6681537" y="4835815"/>
+            <a:ext cx="2654968" cy="134007"/>
+          </a:xfrm>
+          <a:prstGeom prst="rect">
+            <a:avLst/>
+          </a:prstGeom>
+        </p:spPr>
+        <p:style>
+          <a:lnRef idx="2">
+            <a:schemeClr val="accent2">
+              <a:shade val="15000"/>
+            </a:schemeClr>
+          </a:lnRef>
+          <a:fillRef idx="1">
+            <a:schemeClr val="accent2"/>
+          </a:fillRef>
+          <a:effectRef idx="0">
+            <a:schemeClr val="accent2"/>
+          </a:effectRef>
+          <a:fontRef idx="minor">
+            <a:schemeClr val="lt1"/>
+          </a:fontRef>
+        </p:style>
+        <p:txBody>
+          <a:bodyPr rtlCol="0" anchor="ctr"/>
+          <a:lstStyle/>
+          <a:p>
+            <a:pPr algn="ctr"/>
+            <a:endParaRPr lang="en-US" dirty="0"/>
+          </a:p>
+        </p:txBody>
+      </p:sp>
+      <p:sp>
+        <p:nvSpPr>
+          <p:cNvPr id="23" name="Rectangle 22">
+            <a:extLst>
+              <a:ext uri="{FF2B5EF4-FFF2-40B4-BE49-F238E27FC236}">
+                <a16:creationId xmlns:a16="http://schemas.microsoft.com/office/drawing/2014/main" id="{9936A0C8-36D6-4A6F-9427-D8D5C5F2E849}"/>
+              </a:ext>
+            </a:extLst>
+          </p:cNvPr>
+          <p:cNvSpPr/>
+          <p:nvPr/>
+        </p:nvSpPr>
+        <p:spPr>
+          <a:xfrm>
+            <a:off x="6681537" y="5249001"/>
+            <a:ext cx="2654968" cy="134007"/>
+          </a:xfrm>
+          <a:prstGeom prst="rect">
+            <a:avLst/>
+          </a:prstGeom>
+        </p:spPr>
+        <p:style>
+          <a:lnRef idx="2">
+            <a:schemeClr val="accent2">
+              <a:shade val="15000"/>
+            </a:schemeClr>
+          </a:lnRef>
+          <a:fillRef idx="1">
+            <a:schemeClr val="accent2"/>
+          </a:fillRef>
+          <a:effectRef idx="0">
+            <a:schemeClr val="accent2"/>
+          </a:effectRef>
+          <a:fontRef idx="minor">
+            <a:schemeClr val="lt1"/>
+          </a:fontRef>
+        </p:style>
+        <p:txBody>
+          <a:bodyPr rtlCol="0" anchor="ctr"/>
+          <a:lstStyle/>
+          <a:p>
+            <a:pPr algn="ctr"/>
+            <a:endParaRPr lang="en-US" dirty="0"/>
+          </a:p>
+        </p:txBody>
+      </p:sp>
+      <p:sp>
+        <p:nvSpPr>
+          <p:cNvPr id="25" name="Rectangle 24">
+            <a:extLst>
+              <a:ext uri="{FF2B5EF4-FFF2-40B4-BE49-F238E27FC236}">
+                <a16:creationId xmlns:a16="http://schemas.microsoft.com/office/drawing/2014/main" id="{AA82D259-7054-45FC-68BA-0C797E5D331C}"/>
+              </a:ext>
+            </a:extLst>
+          </p:cNvPr>
+          <p:cNvSpPr/>
+          <p:nvPr/>
+        </p:nvSpPr>
+        <p:spPr>
+          <a:xfrm>
+            <a:off x="7395411" y="5595183"/>
+            <a:ext cx="1443789" cy="134007"/>
+          </a:xfrm>
+          <a:prstGeom prst="rect">
+            <a:avLst/>
+          </a:prstGeom>
+        </p:spPr>
+        <p:style>
+          <a:lnRef idx="2">
+            <a:schemeClr val="accent2">
+              <a:shade val="15000"/>
+            </a:schemeClr>
+          </a:lnRef>
+          <a:fillRef idx="1">
+            <a:schemeClr val="accent2"/>
+          </a:fillRef>
+          <a:effectRef idx="0">
+            <a:schemeClr val="accent2"/>
+          </a:effectRef>
+          <a:fontRef idx="minor">
+            <a:schemeClr val="lt1"/>
+          </a:fontRef>
+        </p:style>
+        <p:txBody>
+          <a:bodyPr rtlCol="0" anchor="ctr"/>
+          <a:lstStyle/>
+          <a:p>
+            <a:pPr algn="ctr"/>
+            <a:endParaRPr lang="en-US" dirty="0"/>
+          </a:p>
+        </p:txBody>
+      </p:sp>
+      <p:sp>
+        <p:nvSpPr>
+          <p:cNvPr id="27" name="Rectangle 26">
+            <a:extLst>
+              <a:ext uri="{FF2B5EF4-FFF2-40B4-BE49-F238E27FC236}">
+                <a16:creationId xmlns:a16="http://schemas.microsoft.com/office/drawing/2014/main" id="{4CC2FCFD-CD85-ABFA-C2B8-F0F23F35D20E}"/>
+              </a:ext>
+            </a:extLst>
+          </p:cNvPr>
+          <p:cNvSpPr/>
+          <p:nvPr/>
+        </p:nvSpPr>
+        <p:spPr>
+          <a:xfrm>
+            <a:off x="6565232" y="5807358"/>
+            <a:ext cx="2019646" cy="134007"/>
+          </a:xfrm>
+          <a:prstGeom prst="rect">
+            <a:avLst/>
+          </a:prstGeom>
+        </p:spPr>
+        <p:style>
+          <a:lnRef idx="2">
+            <a:schemeClr val="accent2">
+              <a:shade val="15000"/>
+            </a:schemeClr>
+          </a:lnRef>
+          <a:fillRef idx="1">
+            <a:schemeClr val="accent2"/>
+          </a:fillRef>
+          <a:effectRef idx="0">
+            <a:schemeClr val="accent2"/>
+          </a:effectRef>
+          <a:fontRef idx="minor">
+            <a:schemeClr val="lt1"/>
+          </a:fontRef>
+        </p:style>
+        <p:txBody>
+          <a:bodyPr rtlCol="0" anchor="ctr"/>
+          <a:lstStyle/>
+          <a:p>
+            <a:pPr algn="ctr"/>
+            <a:endParaRPr lang="en-US" dirty="0"/>
+          </a:p>
+        </p:txBody>
+      </p:sp>
+      <p:sp>
+        <p:nvSpPr>
+          <p:cNvPr id="3" name="Rectangle 2">
+            <a:extLst>
+              <a:ext uri="{FF2B5EF4-FFF2-40B4-BE49-F238E27FC236}">
+                <a16:creationId xmlns:a16="http://schemas.microsoft.com/office/drawing/2014/main" id="{35CFF9F7-2D94-82D6-3082-74B5548A83BC}"/>
+              </a:ext>
+            </a:extLst>
+          </p:cNvPr>
+          <p:cNvSpPr/>
+          <p:nvPr/>
+        </p:nvSpPr>
+        <p:spPr>
+          <a:xfrm>
+            <a:off x="5495636" y="948402"/>
+            <a:ext cx="4068876" cy="5378507"/>
+          </a:xfrm>
+          <a:prstGeom prst="rect">
+            <a:avLst/>
+          </a:prstGeom>
+          <a:noFill/>
+          <a:ln w="50800">
+            <a:solidFill>
+              <a:srgbClr val="FF0000"/>
+            </a:solidFill>
+          </a:ln>
+        </p:spPr>
+        <p:style>
+          <a:lnRef idx="2">
+            <a:schemeClr val="accent1">
+              <a:shade val="50000"/>
+            </a:schemeClr>
+          </a:lnRef>
+          <a:fillRef idx="1">
+            <a:schemeClr val="accent1"/>
+          </a:fillRef>
+          <a:effectRef idx="0">
+            <a:schemeClr val="accent1"/>
+          </a:effectRef>
+          <a:fontRef idx="minor">
+            <a:schemeClr val="lt1"/>
+          </a:fontRef>
+        </p:style>
+        <p:txBody>
+          <a:bodyPr rtlCol="0" anchor="ctr"/>
+          <a:lstStyle/>
+          <a:p>
+            <a:pPr algn="ctr"/>
+            <a:endParaRPr lang="en-US"/>
+          </a:p>
+        </p:txBody>
+      </p:sp>
+    </p:spTree>
+    <p:extLst>
+      <p:ext uri="{BB962C8B-B14F-4D97-AF65-F5344CB8AC3E}">
+        <p14:creationId xmlns:p14="http://schemas.microsoft.com/office/powerpoint/2010/main" val="1764195459"/>
       </p:ext>
     </p:extLst>
   </p:cSld>
